--- a/docs/factory-scope-bpr-alignment.pptx
+++ b/docs/factory-scope-bpr-alignment.pptx
@@ -1078,7 +1078,7 @@
               <a:buNone/>
             </a:pPr>
             <a:r>
-              <a:rPr lang="en-US" sz="1700" b="1" dirty="0">
+              <a:rPr lang="en-US" sz="1800" b="1" dirty="0">
                 <a:solidFill>
                   <a:srgbClr val="1F3D20"/>
                 </a:solidFill>
@@ -1086,9 +1086,9 @@
                 <a:ea typeface="Meiryo UI" pitchFamily="34" charset="-122"/>
                 <a:cs typeface="Meiryo UI" pitchFamily="34" charset="-120"/>
               </a:rPr>
-              <a:t>工場「生産性向上検討」との統合整理 — 過去検討は資産である</a:t>
-            </a:r>
-            <a:endParaRPr lang="en-US" sz="1700" dirty="0"/>
+              <a:t>過去の検討は資産 — やり直しではなく、計算のし直し</a:t>
+            </a:r>
+            <a:endParaRPr lang="en-US" sz="1800" dirty="0"/>
           </a:p>
         </p:txBody>
       </p:sp>
@@ -1117,7 +1117,7 @@
               <a:buNone/>
             </a:pPr>
             <a:r>
-              <a:rPr lang="en-US" sz="700" dirty="0">
+              <a:rPr lang="en-US" sz="750" dirty="0">
                 <a:solidFill>
                   <a:srgbClr val="595959"/>
                 </a:solidFill>
@@ -1125,9 +1125,9 @@
                 <a:ea typeface="Meiryo UI" pitchFamily="34" charset="-122"/>
                 <a:cs typeface="Meiryo UI" pitchFamily="34" charset="-120"/>
               </a:rPr>
-              <a:t>2026/8/28 意見交換｜入力: 明工・生技G資料(8/27)+BPR資料</a:t>
-            </a:r>
-            <a:endParaRPr lang="en-US" sz="700" dirty="0"/>
+              <a:t>2026/8/28 意見交換｜明工・生技G資料(8/27)</a:t>
+            </a:r>
+            <a:endParaRPr lang="en-US" sz="750" dirty="0"/>
           </a:p>
         </p:txBody>
       </p:sp>
@@ -1186,7 +1186,7 @@
               <a:buNone/>
             </a:pPr>
             <a:r>
-              <a:rPr lang="en-US" sz="1050" b="1" dirty="0">
+              <a:rPr lang="en-US" sz="1150" b="1" dirty="0">
                 <a:solidFill>
                   <a:srgbClr val="FFFFFF"/>
                 </a:solidFill>
@@ -1194,7 +1194,7 @@
                 <a:ea typeface="Meiryo UI" pitchFamily="34" charset="-122"/>
                 <a:cs typeface="Meiryo UI" pitchFamily="34" charset="-120"/>
               </a:rPr>
-              <a:t>過去の検討をやり直すのではない。</a:t>
+              <a:t>過去の検討をやり直すことはしない。</a:t>
             </a:r>
             <a:pPr indent="0" marL="0">
               <a:lnSpc>
@@ -1203,7 +1203,7 @@
               <a:buNone/>
             </a:pPr>
             <a:r>
-              <a:rPr lang="en-US" sz="1050" dirty="0">
+              <a:rPr lang="en-US" sz="1150" dirty="0">
                 <a:solidFill>
                   <a:srgbClr val="FFFFFF"/>
                 </a:solidFill>
@@ -1211,9 +1211,9 @@
                 <a:ea typeface="Meiryo UI" pitchFamily="34" charset="-122"/>
                 <a:cs typeface="Meiryo UI" pitchFamily="34" charset="-120"/>
               </a:rPr>
-              <a:t>工場の過去の見積もり・スコープアウト判断を台帳の中核資産とし、変わった前提(技術・賃金・目標水準・品質データ)だけを更新して再評価する。</a:t>
-            </a:r>
-            <a:endParaRPr lang="en-US" sz="1050" dirty="0"/>
+              <a:t>過去の見積もりと判断はそのまま活かす。当時から変わった前提だけを入れ替えて、もう一度計算し直す。</a:t>
+            </a:r>
+            <a:endParaRPr lang="en-US" sz="1150" dirty="0"/>
           </a:p>
         </p:txBody>
       </p:sp>
@@ -1225,7 +1225,7 @@
         </p:nvSpPr>
         <p:spPr>
           <a:xfrm>
-            <a:off x="274320" y="1225296"/>
+            <a:off x="274320" y="1243584"/>
             <a:ext cx="11640312" cy="219456"/>
           </a:xfrm>
           <a:prstGeom prst="rect">
@@ -1242,7 +1242,7 @@
               <a:buNone/>
             </a:pPr>
             <a:r>
-              <a:rPr lang="en-US" sz="1000" b="1" dirty="0">
+              <a:rPr lang="en-US" sz="1050" b="1" dirty="0">
                 <a:solidFill>
                   <a:srgbClr val="1F3D20"/>
                 </a:solidFill>
@@ -1250,9 +1250,9 @@
                 <a:ea typeface="Meiryo UI" pitchFamily="34" charset="-122"/>
                 <a:cs typeface="Meiryo UI" pitchFamily="34" charset="-120"/>
               </a:rPr>
-              <a:t>工場の過去検討3案件が示していること — いずれも「現行の作業・資材仕様を所与とした自動化(③)単独」の検討で、あと一歩で停止している</a:t>
-            </a:r>
-            <a:endParaRPr lang="en-US" sz="1000" dirty="0"/>
+              <a:t>工場で過去に検討された3案件 — いずれも「今の作業のまま自動化する」検討で、あと一歩のところで止まっている</a:t>
+            </a:r>
+            <a:endParaRPr lang="en-US" sz="1050" dirty="0"/>
           </a:p>
         </p:txBody>
       </p:sp>
@@ -1271,7 +1271,7 @@
           </p:nvPr>
         </p:nvGraphicFramePr>
         <p:xfrm>
-          <a:off x="274320" y="1481328"/>
+          <a:off x="274320" y="1499616"/>
           <a:ext cx="11640312" cy="914400"/>
         </p:xfrm>
         <a:graphic>
@@ -1279,12 +1279,12 @@
             <a:tbl>
               <a:tblPr/>
               <a:tblGrid>
-                <a:gridCol w="2286000"/>
-                <a:gridCol w="1417320"/>
-                <a:gridCol w="2331720"/>
-                <a:gridCol w="5605272"/>
+                <a:gridCol w="2103120"/>
+                <a:gridCol w="1371600"/>
+                <a:gridCol w="2103120"/>
+                <a:gridCol w="6062472"/>
               </a:tblGrid>
-              <a:tr h="256032">
+              <a:tr h="274320">
                 <a:tc>
                   <a:txBody>
                     <a:bodyPr/>
@@ -1294,7 +1294,7 @@
                         <a:buNone/>
                       </a:pPr>
                       <a:r>
-                        <a:rPr lang="en-US" sz="800" b="1" dirty="0">
+                        <a:rPr lang="en-US" sz="850" b="1" dirty="0">
                           <a:solidFill>
                             <a:srgbClr val="FFFFFF"/>
                           </a:solidFill>
@@ -1302,16 +1302,16 @@
                           <a:ea typeface="Meiryo UI" pitchFamily="34" charset="-122"/>
                           <a:cs typeface="Meiryo UI" pitchFamily="34" charset="-120"/>
                         </a:rPr>
-                        <a:t>過去案件(工場資料より)</a:t>
+                        <a:t>過去に検討した案件</a:t>
                       </a:r>
-                      <a:endParaRPr lang="en-US" sz="800" dirty="0">
+                      <a:endParaRPr lang="en-US" sz="850" dirty="0">
                         <a:latin typeface="Meiryo UI" charset="0"/>
                         <a:ea typeface="Meiryo UI" charset="0"/>
                         <a:cs typeface="Meiryo UI" charset="0"/>
                       </a:endParaRPr>
                     </a:p>
                   </a:txBody>
-                  <a:tcPr marL="54864" marR="54864" marT="54864" marB="54864" anchor="ctr">
+                  <a:tcPr marL="64008" marR="64008" marT="64008" marB="64008" anchor="ctr">
                     <a:lnL w="6350" cap="flat" cmpd="sng" algn="ctr">
                       <a:solidFill>
                         <a:srgbClr val="D3DED0"/>
@@ -1362,7 +1362,7 @@
                         <a:buNone/>
                       </a:pPr>
                       <a:r>
-                        <a:rPr lang="en-US" sz="800" b="1" dirty="0">
+                        <a:rPr lang="en-US" sz="850" b="1" dirty="0">
                           <a:solidFill>
                             <a:srgbClr val="FFFFFF"/>
                           </a:solidFill>
@@ -1372,14 +1372,14 @@
                         </a:rPr>
                         <a:t>見積もり</a:t>
                       </a:r>
-                      <a:endParaRPr lang="en-US" sz="800" dirty="0">
+                      <a:endParaRPr lang="en-US" sz="850" dirty="0">
                         <a:latin typeface="Meiryo UI" charset="0"/>
                         <a:ea typeface="Meiryo UI" charset="0"/>
                         <a:cs typeface="Meiryo UI" charset="0"/>
                       </a:endParaRPr>
                     </a:p>
                   </a:txBody>
-                  <a:tcPr marL="54864" marR="54864" marT="54864" marB="54864" anchor="ctr">
+                  <a:tcPr marL="64008" marR="64008" marT="64008" marB="64008" anchor="ctr">
                     <a:lnL w="6350" cap="flat" cmpd="sng" algn="ctr">
                       <a:solidFill>
                         <a:srgbClr val="D3DED0"/>
@@ -1430,7 +1430,7 @@
                         <a:buNone/>
                       </a:pPr>
                       <a:r>
-                        <a:rPr lang="en-US" sz="800" b="1" dirty="0">
+                        <a:rPr lang="en-US" sz="850" b="1" dirty="0">
                           <a:solidFill>
                             <a:srgbClr val="FFFFFF"/>
                           </a:solidFill>
@@ -1438,16 +1438,16 @@
                           <a:ea typeface="Meiryo UI" pitchFamily="34" charset="-122"/>
                           <a:cs typeface="Meiryo UI" pitchFamily="34" charset="-120"/>
                         </a:rPr>
-                        <a:t>停止した理由</a:t>
+                        <a:t>止まった理由</a:t>
                       </a:r>
-                      <a:endParaRPr lang="en-US" sz="800" dirty="0">
+                      <a:endParaRPr lang="en-US" sz="850" dirty="0">
                         <a:latin typeface="Meiryo UI" charset="0"/>
                         <a:ea typeface="Meiryo UI" charset="0"/>
                         <a:cs typeface="Meiryo UI" charset="0"/>
                       </a:endParaRPr>
                     </a:p>
                   </a:txBody>
-                  <a:tcPr marL="54864" marR="54864" marT="54864" marB="54864" anchor="ctr">
+                  <a:tcPr marL="64008" marR="64008" marT="64008" marB="64008" anchor="ctr">
                     <a:lnL w="6350" cap="flat" cmpd="sng" algn="ctr">
                       <a:solidFill>
                         <a:srgbClr val="D3DED0"/>
@@ -1498,7 +1498,7 @@
                         <a:buNone/>
                       </a:pPr>
                       <a:r>
-                        <a:rPr lang="en-US" sz="800" b="1" dirty="0">
+                        <a:rPr lang="en-US" sz="850" b="1" dirty="0">
                           <a:solidFill>
                             <a:srgbClr val="FFFFFF"/>
                           </a:solidFill>
@@ -1506,16 +1506,16 @@
                           <a:ea typeface="Meiryo UI" pitchFamily="34" charset="-122"/>
                           <a:cs typeface="Meiryo UI" pitchFamily="34" charset="-120"/>
                         </a:rPr>
-                        <a:t>①無くす・②減らすを先に当てた場合の再評価仮説</a:t>
+                        <a:t>もう一度計算し直すと(仮説)</a:t>
                       </a:r>
-                      <a:endParaRPr lang="en-US" sz="800" dirty="0">
+                      <a:endParaRPr lang="en-US" sz="850" dirty="0">
                         <a:latin typeface="Meiryo UI" charset="0"/>
                         <a:ea typeface="Meiryo UI" charset="0"/>
                         <a:cs typeface="Meiryo UI" charset="0"/>
                       </a:endParaRPr>
                     </a:p>
                   </a:txBody>
-                  <a:tcPr marL="54864" marR="54864" marT="54864" marB="54864" anchor="ctr">
+                  <a:tcPr marL="64008" marR="64008" marT="64008" marB="64008" anchor="ctr">
                     <a:lnL w="6350" cap="flat" cmpd="sng" algn="ctr">
                       <a:solidFill>
                         <a:srgbClr val="D3DED0"/>
@@ -1558,7 +1558,7 @@
                   </a:tcPr>
                 </a:tc>
               </a:tr>
-              <a:tr h="566928">
+              <a:tr h="621792">
                 <a:tc>
                   <a:txBody>
                     <a:bodyPr/>
@@ -1568,7 +1568,7 @@
                         <a:buNone/>
                       </a:pPr>
                       <a:r>
-                        <a:rPr lang="en-US" sz="780" b="1" dirty="0">
+                        <a:rPr lang="en-US" sz="830" b="1" dirty="0">
                           <a:solidFill>
                             <a:srgbClr val="2B2B2B"/>
                           </a:solidFill>
@@ -1576,16 +1576,37 @@
                           <a:ea typeface="Meiryo UI" pitchFamily="34" charset="-122"/>
                           <a:cs typeface="Meiryo UI" pitchFamily="34" charset="-120"/>
                         </a:rPr>
-                        <a:t>チューブ供給自動化(歯磨包装)</a:t>
+                        <a:t>チューブ供給の自動化</a:t>
                       </a:r>
-                      <a:endParaRPr lang="en-US" sz="780" dirty="0">
+                      <a:endParaRPr lang="en-US" sz="830" dirty="0">
+                        <a:latin typeface="Meiryo UI" charset="0"/>
+                        <a:ea typeface="Meiryo UI" charset="0"/>
+                        <a:cs typeface="Meiryo UI" charset="0"/>
+                      </a:endParaRPr>
+                    </a:p>
+                    <a:p>
+                      <a:pPr indent="0" marL="0">
+                        <a:buNone/>
+                      </a:pPr>
+                      <a:r>
+                        <a:rPr lang="en-US" sz="830" b="1" dirty="0">
+                          <a:solidFill>
+                            <a:srgbClr val="2B2B2B"/>
+                          </a:solidFill>
+                          <a:latin typeface="Meiryo UI" pitchFamily="34" charset="0"/>
+                          <a:ea typeface="Meiryo UI" pitchFamily="34" charset="-122"/>
+                          <a:cs typeface="Meiryo UI" pitchFamily="34" charset="-120"/>
+                        </a:rPr>
+                        <a:t>(歯磨包装)</a:t>
+                      </a:r>
+                      <a:endParaRPr lang="en-US" sz="830" dirty="0">
                         <a:latin typeface="Meiryo UI" charset="0"/>
                         <a:ea typeface="Meiryo UI" charset="0"/>
                         <a:cs typeface="Meiryo UI" charset="0"/>
                       </a:endParaRPr>
                     </a:p>
                   </a:txBody>
-                  <a:tcPr marL="54864" marR="54864" marT="54864" marB="54864" anchor="ctr">
+                  <a:tcPr marL="64008" marR="64008" marT="64008" marB="64008" anchor="ctr">
                     <a:lnL w="6350" cap="flat" cmpd="sng" algn="ctr">
                       <a:solidFill>
                         <a:srgbClr val="D3DED0"/>
@@ -1633,7 +1654,7 @@
                         <a:buNone/>
                       </a:pPr>
                       <a:r>
-                        <a:rPr lang="en-US" sz="780" dirty="0">
+                        <a:rPr lang="en-US" sz="830" dirty="0">
                           <a:solidFill>
                             <a:srgbClr val="2B2B2B"/>
                           </a:solidFill>
@@ -1641,16 +1662,37 @@
                           <a:ea typeface="Meiryo UI" pitchFamily="34" charset="-122"/>
                           <a:cs typeface="Meiryo UI" pitchFamily="34" charset="-120"/>
                         </a:rPr>
-                        <a:t>76,000千円(▲1名)</a:t>
+                        <a:t>76,000千円</a:t>
                       </a:r>
-                      <a:endParaRPr lang="en-US" sz="780" dirty="0">
+                      <a:endParaRPr lang="en-US" sz="830" dirty="0">
+                        <a:latin typeface="Meiryo UI" charset="0"/>
+                        <a:ea typeface="Meiryo UI" charset="0"/>
+                        <a:cs typeface="Meiryo UI" charset="0"/>
+                      </a:endParaRPr>
+                    </a:p>
+                    <a:p>
+                      <a:pPr algn="ctr" indent="0" marL="0">
+                        <a:buNone/>
+                      </a:pPr>
+                      <a:r>
+                        <a:rPr lang="en-US" sz="830" dirty="0">
+                          <a:solidFill>
+                            <a:srgbClr val="2B2B2B"/>
+                          </a:solidFill>
+                          <a:latin typeface="Meiryo UI" pitchFamily="34" charset="0"/>
+                          <a:ea typeface="Meiryo UI" pitchFamily="34" charset="-122"/>
+                          <a:cs typeface="Meiryo UI" pitchFamily="34" charset="-120"/>
+                        </a:rPr>
+                        <a:t>(▲1名)</a:t>
+                      </a:r>
+                      <a:endParaRPr lang="en-US" sz="830" dirty="0">
                         <a:latin typeface="Meiryo UI" charset="0"/>
                         <a:ea typeface="Meiryo UI" charset="0"/>
                         <a:cs typeface="Meiryo UI" charset="0"/>
                       </a:endParaRPr>
                     </a:p>
                   </a:txBody>
-                  <a:tcPr marL="54864" marR="54864" marT="54864" marB="54864" anchor="ctr">
+                  <a:tcPr marL="64008" marR="64008" marT="64008" marB="64008" anchor="ctr">
                     <a:lnL w="6350" cap="flat" cmpd="sng" algn="ctr">
                       <a:solidFill>
                         <a:srgbClr val="D3DED0"/>
@@ -1698,7 +1740,7 @@
                         <a:buNone/>
                       </a:pPr>
                       <a:r>
-                        <a:rPr lang="en-US" sz="780" dirty="0">
+                        <a:rPr lang="en-US" sz="830" b="1" dirty="0">
                           <a:solidFill>
                             <a:srgbClr val="B85042"/>
                           </a:solidFill>
@@ -1706,16 +1748,16 @@
                           <a:ea typeface="Meiryo UI" pitchFamily="34" charset="-122"/>
                           <a:cs typeface="Meiryo UI" pitchFamily="34" charset="-120"/>
                         </a:rPr>
-                        <a:t>投資基準(39,200千円/名)を超過 → 継続検討中</a:t>
+                        <a:t>投資基準(39,200千円/名)を超えた</a:t>
                       </a:r>
-                      <a:endParaRPr lang="en-US" sz="780" dirty="0">
+                      <a:endParaRPr lang="en-US" sz="830" dirty="0">
                         <a:latin typeface="Meiryo UI" charset="0"/>
                         <a:ea typeface="Meiryo UI" charset="0"/>
                         <a:cs typeface="Meiryo UI" charset="0"/>
                       </a:endParaRPr>
                     </a:p>
                   </a:txBody>
-                  <a:tcPr marL="54864" marR="54864" marT="54864" marB="54864" anchor="ctr">
+                  <a:tcPr marL="64008" marR="64008" marT="64008" marB="64008" anchor="ctr">
                     <a:lnL w="6350" cap="flat" cmpd="sng" algn="ctr">
                       <a:solidFill>
                         <a:srgbClr val="D3DED0"/>
@@ -1763,7 +1805,7 @@
                         <a:buNone/>
                       </a:pPr>
                       <a:r>
-                        <a:rPr lang="en-US" sz="780" dirty="0">
+                        <a:rPr lang="en-US" sz="830" dirty="0">
                           <a:solidFill>
                             <a:srgbClr val="2B2B2B"/>
                           </a:solidFill>
@@ -1771,16 +1813,16 @@
                           <a:ea typeface="Meiryo UI" pitchFamily="34" charset="-122"/>
                           <a:cs typeface="Meiryo UI" pitchFamily="34" charset="-120"/>
                         </a:rPr>
-                        <a:t>見積もりを押し上げるサブルーチン(養生布抜取・定数チェック・PL天地反転)を資材仕様・受入基準の変更で消せば、装置は「運ぶだけ」に単純化 → 再見積もりで基準内の可能性</a:t>
+                        <a:t>装置を高くしているのは、養生布はがし・数のチェック・パレット反転などの付帯作業。資材や受入ルールを変えてこれらを無くせば、装置は「運ぶだけ」になり安くなる</a:t>
                       </a:r>
-                      <a:endParaRPr lang="en-US" sz="780" dirty="0">
+                      <a:endParaRPr lang="en-US" sz="830" dirty="0">
                         <a:latin typeface="Meiryo UI" charset="0"/>
                         <a:ea typeface="Meiryo UI" charset="0"/>
                         <a:cs typeface="Meiryo UI" charset="0"/>
                       </a:endParaRPr>
                     </a:p>
                   </a:txBody>
-                  <a:tcPr marL="54864" marR="54864" marT="54864" marB="54864" anchor="ctr">
+                  <a:tcPr marL="64008" marR="64008" marT="64008" marB="64008" anchor="ctr">
                     <a:lnL w="6350" cap="flat" cmpd="sng" algn="ctr">
                       <a:solidFill>
                         <a:srgbClr val="D3DED0"/>
@@ -1820,7 +1862,7 @@
                   </a:tcPr>
                 </a:tc>
               </a:tr>
-              <a:tr h="502920">
+              <a:tr h="530352">
                 <a:tc>
                   <a:txBody>
                     <a:bodyPr/>
@@ -1830,7 +1872,7 @@
                         <a:buNone/>
                       </a:pPr>
                       <a:r>
-                        <a:rPr lang="en-US" sz="780" b="1" dirty="0">
+                        <a:rPr lang="en-US" sz="830" b="1" dirty="0">
                           <a:solidFill>
                             <a:srgbClr val="2B2B2B"/>
                           </a:solidFill>
@@ -1838,16 +1880,37 @@
                           <a:ea typeface="Meiryo UI" pitchFamily="34" charset="-122"/>
                           <a:cs typeface="Meiryo UI" pitchFamily="34" charset="-120"/>
                         </a:rPr>
-                        <a:t>中間製品供給機(包装20号)</a:t>
+                        <a:t>中間製品供給機</a:t>
                       </a:r>
-                      <a:endParaRPr lang="en-US" sz="780" dirty="0">
+                      <a:endParaRPr lang="en-US" sz="830" dirty="0">
+                        <a:latin typeface="Meiryo UI" charset="0"/>
+                        <a:ea typeface="Meiryo UI" charset="0"/>
+                        <a:cs typeface="Meiryo UI" charset="0"/>
+                      </a:endParaRPr>
+                    </a:p>
+                    <a:p>
+                      <a:pPr indent="0" marL="0">
+                        <a:buNone/>
+                      </a:pPr>
+                      <a:r>
+                        <a:rPr lang="en-US" sz="830" b="1" dirty="0">
+                          <a:solidFill>
+                            <a:srgbClr val="2B2B2B"/>
+                          </a:solidFill>
+                          <a:latin typeface="Meiryo UI" pitchFamily="34" charset="0"/>
+                          <a:ea typeface="Meiryo UI" pitchFamily="34" charset="-122"/>
+                          <a:cs typeface="Meiryo UI" pitchFamily="34" charset="-120"/>
+                        </a:rPr>
+                        <a:t>(包装20号)</a:t>
+                      </a:r>
+                      <a:endParaRPr lang="en-US" sz="830" dirty="0">
                         <a:latin typeface="Meiryo UI" charset="0"/>
                         <a:ea typeface="Meiryo UI" charset="0"/>
                         <a:cs typeface="Meiryo UI" charset="0"/>
                       </a:endParaRPr>
                     </a:p>
                   </a:txBody>
-                  <a:tcPr marL="54864" marR="54864" marT="54864" marB="54864" anchor="ctr">
+                  <a:tcPr marL="64008" marR="64008" marT="64008" marB="64008" anchor="ctr">
                     <a:lnL w="6350" cap="flat" cmpd="sng" algn="ctr">
                       <a:solidFill>
                         <a:srgbClr val="D3DED0"/>
@@ -1895,7 +1958,7 @@
                         <a:buNone/>
                       </a:pPr>
                       <a:r>
-                        <a:rPr lang="en-US" sz="780" dirty="0">
+                        <a:rPr lang="en-US" sz="830" dirty="0">
                           <a:solidFill>
                             <a:srgbClr val="2B2B2B"/>
                           </a:solidFill>
@@ -1903,16 +1966,37 @@
                           <a:ea typeface="Meiryo UI" pitchFamily="34" charset="-122"/>
                           <a:cs typeface="Meiryo UI" pitchFamily="34" charset="-120"/>
                         </a:rPr>
-                        <a:t>130,000千円(▲6名/2直)</a:t>
+                        <a:t>130,000千円</a:t>
                       </a:r>
-                      <a:endParaRPr lang="en-US" sz="780" dirty="0">
+                      <a:endParaRPr lang="en-US" sz="830" dirty="0">
+                        <a:latin typeface="Meiryo UI" charset="0"/>
+                        <a:ea typeface="Meiryo UI" charset="0"/>
+                        <a:cs typeface="Meiryo UI" charset="0"/>
+                      </a:endParaRPr>
+                    </a:p>
+                    <a:p>
+                      <a:pPr algn="ctr" indent="0" marL="0">
+                        <a:buNone/>
+                      </a:pPr>
+                      <a:r>
+                        <a:rPr lang="en-US" sz="830" dirty="0">
+                          <a:solidFill>
+                            <a:srgbClr val="2B2B2B"/>
+                          </a:solidFill>
+                          <a:latin typeface="Meiryo UI" pitchFamily="34" charset="0"/>
+                          <a:ea typeface="Meiryo UI" pitchFamily="34" charset="-122"/>
+                          <a:cs typeface="Meiryo UI" pitchFamily="34" charset="-120"/>
+                        </a:rPr>
+                        <a:t>(▲6名/2直)</a:t>
+                      </a:r>
+                      <a:endParaRPr lang="en-US" sz="830" dirty="0">
                         <a:latin typeface="Meiryo UI" charset="0"/>
                         <a:ea typeface="Meiryo UI" charset="0"/>
                         <a:cs typeface="Meiryo UI" charset="0"/>
                       </a:endParaRPr>
                     </a:p>
                   </a:txBody>
-                  <a:tcPr marL="54864" marR="54864" marT="54864" marB="54864" anchor="ctr">
+                  <a:tcPr marL="64008" marR="64008" marT="64008" marB="64008" anchor="ctr">
                     <a:lnL w="6350" cap="flat" cmpd="sng" algn="ctr">
                       <a:solidFill>
                         <a:srgbClr val="D3DED0"/>
@@ -1960,7 +2044,7 @@
                         <a:buNone/>
                       </a:pPr>
                       <a:r>
-                        <a:rPr lang="en-US" sz="780" dirty="0">
+                        <a:rPr lang="en-US" sz="830" b="1" dirty="0">
                           <a:solidFill>
                             <a:srgbClr val="B85042"/>
                           </a:solidFill>
@@ -1968,16 +2052,16 @@
                           <a:ea typeface="Meiryo UI" pitchFamily="34" charset="-122"/>
                           <a:cs typeface="Meiryo UI" pitchFamily="34" charset="-120"/>
                         </a:rPr>
-                        <a:t>スペース切迫で導入不可</a:t>
+                        <a:t>置く場所がない</a:t>
                       </a:r>
-                      <a:endParaRPr lang="en-US" sz="780" dirty="0">
+                      <a:endParaRPr lang="en-US" sz="830" dirty="0">
                         <a:latin typeface="Meiryo UI" charset="0"/>
                         <a:ea typeface="Meiryo UI" charset="0"/>
                         <a:cs typeface="Meiryo UI" charset="0"/>
                       </a:endParaRPr>
                     </a:p>
                   </a:txBody>
-                  <a:tcPr marL="54864" marR="54864" marT="54864" marB="54864" anchor="ctr">
+                  <a:tcPr marL="64008" marR="64008" marT="64008" marB="64008" anchor="ctr">
                     <a:lnL w="6350" cap="flat" cmpd="sng" algn="ctr">
                       <a:solidFill>
                         <a:srgbClr val="D3DED0"/>
@@ -2025,7 +2109,7 @@
                         <a:buNone/>
                       </a:pPr>
                       <a:r>
-                        <a:rPr lang="en-US" sz="780" dirty="0">
+                        <a:rPr lang="en-US" sz="830" dirty="0">
                           <a:solidFill>
                             <a:srgbClr val="2B2B2B"/>
                           </a:solidFill>
@@ -2033,16 +2117,16 @@
                           <a:ea typeface="Meiryo UI" pitchFamily="34" charset="-122"/>
                           <a:cs typeface="Meiryo UI" pitchFamily="34" charset="-120"/>
                         </a:rPr>
-                        <a:t>単ライン専用機の前提を離れ、②集約(複数ライン供給の統合・AMR化)でレイアウト前提ごと再検討</a:t>
+                        <a:t>「1ラインに専用機1台」だから場所が足りない。複数ラインの供給をまとめて運ぶ方式(AMR)にすれば、この前提ごと変わる</a:t>
                       </a:r>
-                      <a:endParaRPr lang="en-US" sz="780" dirty="0">
+                      <a:endParaRPr lang="en-US" sz="830" dirty="0">
                         <a:latin typeface="Meiryo UI" charset="0"/>
                         <a:ea typeface="Meiryo UI" charset="0"/>
                         <a:cs typeface="Meiryo UI" charset="0"/>
                       </a:endParaRPr>
                     </a:p>
                   </a:txBody>
-                  <a:tcPr marL="54864" marR="54864" marT="54864" marB="54864" anchor="ctr">
+                  <a:tcPr marL="64008" marR="64008" marT="64008" marB="64008" anchor="ctr">
                     <a:lnL w="6350" cap="flat" cmpd="sng" algn="ctr">
                       <a:solidFill>
                         <a:srgbClr val="D3DED0"/>
@@ -2082,7 +2166,7 @@
                   </a:tcPr>
                 </a:tc>
               </a:tr>
-              <a:tr h="566928">
+              <a:tr h="658368">
                 <a:tc>
                   <a:txBody>
                     <a:bodyPr/>
@@ -2092,7 +2176,7 @@
                         <a:buNone/>
                       </a:pPr>
                       <a:r>
-                        <a:rPr lang="en-US" sz="780" b="1" dirty="0">
+                        <a:rPr lang="en-US" sz="830" b="1" dirty="0">
                           <a:solidFill>
                             <a:srgbClr val="2B2B2B"/>
                           </a:solidFill>
@@ -2100,16 +2184,37 @@
                           <a:ea typeface="Meiryo UI" pitchFamily="34" charset="-122"/>
                           <a:cs typeface="Meiryo UI" pitchFamily="34" charset="-120"/>
                         </a:rPr>
-                        <a:t>ハンドル供給機(植毛31-7,8号)</a:t>
+                        <a:t>ハンドル供給機</a:t>
                       </a:r>
-                      <a:endParaRPr lang="en-US" sz="780" dirty="0">
+                      <a:endParaRPr lang="en-US" sz="830" dirty="0">
+                        <a:latin typeface="Meiryo UI" charset="0"/>
+                        <a:ea typeface="Meiryo UI" charset="0"/>
+                        <a:cs typeface="Meiryo UI" charset="0"/>
+                      </a:endParaRPr>
+                    </a:p>
+                    <a:p>
+                      <a:pPr indent="0" marL="0">
+                        <a:buNone/>
+                      </a:pPr>
+                      <a:r>
+                        <a:rPr lang="en-US" sz="830" b="1" dirty="0">
+                          <a:solidFill>
+                            <a:srgbClr val="2B2B2B"/>
+                          </a:solidFill>
+                          <a:latin typeface="Meiryo UI" pitchFamily="34" charset="0"/>
+                          <a:ea typeface="Meiryo UI" pitchFamily="34" charset="-122"/>
+                          <a:cs typeface="Meiryo UI" pitchFamily="34" charset="-120"/>
+                        </a:rPr>
+                        <a:t>(植毛31-7,8号)</a:t>
+                      </a:r>
+                      <a:endParaRPr lang="en-US" sz="830" dirty="0">
                         <a:latin typeface="Meiryo UI" charset="0"/>
                         <a:ea typeface="Meiryo UI" charset="0"/>
                         <a:cs typeface="Meiryo UI" charset="0"/>
                       </a:endParaRPr>
                     </a:p>
                   </a:txBody>
-                  <a:tcPr marL="54864" marR="54864" marT="54864" marB="54864" anchor="ctr">
+                  <a:tcPr marL="64008" marR="64008" marT="64008" marB="64008" anchor="ctr">
                     <a:lnL w="6350" cap="flat" cmpd="sng" algn="ctr">
                       <a:solidFill>
                         <a:srgbClr val="D3DED0"/>
@@ -2157,7 +2262,7 @@
                         <a:buNone/>
                       </a:pPr>
                       <a:r>
-                        <a:rPr lang="en-US" sz="780" dirty="0">
+                        <a:rPr lang="en-US" sz="830" dirty="0">
                           <a:solidFill>
                             <a:srgbClr val="2B2B2B"/>
                           </a:solidFill>
@@ -2165,16 +2270,37 @@
                           <a:ea typeface="Meiryo UI" pitchFamily="34" charset="-122"/>
                           <a:cs typeface="Meiryo UI" pitchFamily="34" charset="-120"/>
                         </a:rPr>
-                        <a:t>54,800千円(▲1名)</a:t>
+                        <a:t>54,800千円</a:t>
                       </a:r>
-                      <a:endParaRPr lang="en-US" sz="780" dirty="0">
+                      <a:endParaRPr lang="en-US" sz="830" dirty="0">
+                        <a:latin typeface="Meiryo UI" charset="0"/>
+                        <a:ea typeface="Meiryo UI" charset="0"/>
+                        <a:cs typeface="Meiryo UI" charset="0"/>
+                      </a:endParaRPr>
+                    </a:p>
+                    <a:p>
+                      <a:pPr algn="ctr" indent="0" marL="0">
+                        <a:buNone/>
+                      </a:pPr>
+                      <a:r>
+                        <a:rPr lang="en-US" sz="830" dirty="0">
+                          <a:solidFill>
+                            <a:srgbClr val="2B2B2B"/>
+                          </a:solidFill>
+                          <a:latin typeface="Meiryo UI" pitchFamily="34" charset="0"/>
+                          <a:ea typeface="Meiryo UI" pitchFamily="34" charset="-122"/>
+                          <a:cs typeface="Meiryo UI" pitchFamily="34" charset="-120"/>
+                        </a:rPr>
+                        <a:t>(▲1名)</a:t>
+                      </a:r>
+                      <a:endParaRPr lang="en-US" sz="830" dirty="0">
                         <a:latin typeface="Meiryo UI" charset="0"/>
                         <a:ea typeface="Meiryo UI" charset="0"/>
                         <a:cs typeface="Meiryo UI" charset="0"/>
                       </a:endParaRPr>
                     </a:p>
                   </a:txBody>
-                  <a:tcPr marL="54864" marR="54864" marT="54864" marB="54864" anchor="ctr">
+                  <a:tcPr marL="64008" marR="64008" marT="64008" marB="64008" anchor="ctr">
                     <a:lnL w="6350" cap="flat" cmpd="sng" algn="ctr">
                       <a:solidFill>
                         <a:srgbClr val="D3DED0"/>
@@ -2222,7 +2348,7 @@
                         <a:buNone/>
                       </a:pPr>
                       <a:r>
-                        <a:rPr lang="en-US" sz="780" dirty="0">
+                        <a:rPr lang="en-US" sz="830" b="1" dirty="0">
                           <a:solidFill>
                             <a:srgbClr val="B85042"/>
                           </a:solidFill>
@@ -2230,16 +2356,16 @@
                           <a:ea typeface="Meiryo UI" pitchFamily="34" charset="-122"/>
                           <a:cs typeface="Meiryo UI" pitchFamily="34" charset="-120"/>
                         </a:rPr>
-                        <a:t>費用対効果低 → ヒューマノイド検討中</a:t>
+                        <a:t>費用対効果が合わない</a:t>
                       </a:r>
-                      <a:endParaRPr lang="en-US" sz="780" dirty="0">
+                      <a:endParaRPr lang="en-US" sz="830" dirty="0">
                         <a:latin typeface="Meiryo UI" charset="0"/>
                         <a:ea typeface="Meiryo UI" charset="0"/>
                         <a:cs typeface="Meiryo UI" charset="0"/>
                       </a:endParaRPr>
                     </a:p>
                   </a:txBody>
-                  <a:tcPr marL="54864" marR="54864" marT="54864" marB="54864" anchor="ctr">
+                  <a:tcPr marL="64008" marR="64008" marT="64008" marB="64008" anchor="ctr">
                     <a:lnL w="6350" cap="flat" cmpd="sng" algn="ctr">
                       <a:solidFill>
                         <a:srgbClr val="D3DED0"/>
@@ -2287,7 +2413,7 @@
                         <a:buNone/>
                       </a:pPr>
                       <a:r>
-                        <a:rPr lang="en-US" sz="780" dirty="0">
+                        <a:rPr lang="en-US" sz="830" dirty="0">
                           <a:solidFill>
                             <a:srgbClr val="2B2B2B"/>
                           </a:solidFill>
@@ -2295,16 +2421,16 @@
                           <a:ea typeface="Meiryo UI" pitchFamily="34" charset="-122"/>
                           <a:cs typeface="Meiryo UI" pitchFamily="34" charset="-120"/>
                         </a:rPr>
-                        <a:t>ヒューマノイド/フィジカルAIの本質は可搬・複数作業兼務。供給+箱詰め+巡回を1台で束ねれば「1名あたり投資」の計算自体が変わる</a:t>
+                        <a:t>「ロボット1台に1つの作業」では元が取れない。1台に供給+箱詰め+見回りを兼ねさせれば、1名減らすのに必要な投資額が下がる(工場検討中のヒューマノイドはまさにこの発想)</a:t>
                       </a:r>
-                      <a:endParaRPr lang="en-US" sz="780" dirty="0">
+                      <a:endParaRPr lang="en-US" sz="830" dirty="0">
                         <a:latin typeface="Meiryo UI" charset="0"/>
                         <a:ea typeface="Meiryo UI" charset="0"/>
                         <a:cs typeface="Meiryo UI" charset="0"/>
                       </a:endParaRPr>
                     </a:p>
                   </a:txBody>
-                  <a:tcPr marL="54864" marR="54864" marT="54864" marB="54864" anchor="ctr">
+                  <a:tcPr marL="64008" marR="64008" marT="64008" marB="64008" anchor="ctr">
                     <a:lnL w="6350" cap="flat" cmpd="sng" algn="ctr">
                       <a:solidFill>
                         <a:srgbClr val="D3DED0"/>
@@ -2356,12 +2482,12 @@
         </p:nvSpPr>
         <p:spPr>
           <a:xfrm>
-            <a:off x="274320" y="3566160"/>
-            <a:ext cx="11640312" cy="603504"/>
+            <a:off x="274320" y="3767328"/>
+            <a:ext cx="11640312" cy="621792"/>
           </a:xfrm>
           <a:prstGeom prst="roundRect">
             <a:avLst>
-              <a:gd name="adj" fmla="val 9091"/>
+              <a:gd name="adj" fmla="val 8824"/>
             </a:avLst>
           </a:prstGeom>
           <a:solidFill>
@@ -2383,8 +2509,8 @@
         </p:nvSpPr>
         <p:spPr>
           <a:xfrm>
-            <a:off x="420624" y="3566160"/>
-            <a:ext cx="11338560" cy="603504"/>
+            <a:off x="420624" y="3767328"/>
+            <a:ext cx="11338560" cy="621792"/>
           </a:xfrm>
           <a:prstGeom prst="rect">
             <a:avLst/>
@@ -2403,7 +2529,7 @@
               <a:buNone/>
             </a:pPr>
             <a:r>
-              <a:rPr lang="en-US" sz="1000" b="1" dirty="0">
+              <a:rPr lang="en-US" sz="1050" b="1" dirty="0">
                 <a:solidFill>
                   <a:srgbClr val="B85042"/>
                 </a:solidFill>
@@ -2411,7 +2537,7 @@
                 <a:ea typeface="Meiryo UI" pitchFamily="34" charset="-122"/>
                 <a:cs typeface="Meiryo UI" pitchFamily="34" charset="-120"/>
               </a:rPr>
-              <a:t>含意: </a:t>
+              <a:t>ここから言えること: </a:t>
             </a:r>
             <a:pPr indent="0" marL="0">
               <a:lnSpc>
@@ -2420,7 +2546,7 @@
               <a:buNone/>
             </a:pPr>
             <a:r>
-              <a:rPr lang="en-US" sz="900" dirty="0">
+              <a:rPr lang="en-US" sz="950" dirty="0">
                 <a:solidFill>
                   <a:srgbClr val="2B2B2B"/>
                 </a:solidFill>
@@ -2428,7 +2554,7 @@
                 <a:ea typeface="Meiryo UI" pitchFamily="34" charset="-122"/>
                 <a:cs typeface="Meiryo UI" pitchFamily="34" charset="-120"/>
               </a:rPr>
-              <a:t>「何度も検討して今の体制」は事実。ただしその検討はすべて③単独であり、3件とも投資基準・スペースで停止した。必要なのはやり直しではなく、</a:t>
+              <a:t>「何度も検討して今の体制」は事実。ただし3件とも、投資基準か場所の問題で「あと一歩」で止まっている。足りないのは検討のやり直しではなく、</a:t>
             </a:r>
             <a:pPr indent="0" marL="0">
               <a:lnSpc>
@@ -2437,7 +2563,7 @@
               <a:buNone/>
             </a:pPr>
             <a:r>
-              <a:rPr lang="en-US" sz="900" b="1" dirty="0">
+              <a:rPr lang="en-US" sz="950" b="1" dirty="0">
                 <a:solidFill>
                   <a:srgbClr val="2B2B2B"/>
                 </a:solidFill>
@@ -2445,9 +2571,9 @@
                 <a:ea typeface="Meiryo UI" pitchFamily="34" charset="-122"/>
                 <a:cs typeface="Meiryo UI" pitchFamily="34" charset="-120"/>
               </a:rPr>
-              <a:t>装置の要求仕様を軽くする前処理(①②)を足して再見積もりすること。</a:t>
-            </a:r>
-            <a:endParaRPr lang="en-US" sz="1000" dirty="0"/>
+              <a:t>装置の仕事を軽くしてから、見積もりをし直すこと。</a:t>
+            </a:r>
+            <a:endParaRPr lang="en-US" sz="1050" dirty="0"/>
           </a:p>
         </p:txBody>
       </p:sp>
@@ -2459,7 +2585,7 @@
         </p:nvSpPr>
         <p:spPr>
           <a:xfrm>
-            <a:off x="274320" y="4334256"/>
+            <a:off x="274320" y="4553712"/>
             <a:ext cx="11640312" cy="219456"/>
           </a:xfrm>
           <a:prstGeom prst="rect">
@@ -2476,7 +2602,7 @@
               <a:buNone/>
             </a:pPr>
             <a:r>
-              <a:rPr lang="en-US" sz="1000" b="1" dirty="0">
+              <a:rPr lang="en-US" sz="1050" b="1" dirty="0">
                 <a:solidFill>
                   <a:srgbClr val="1F3D20"/>
                 </a:solidFill>
@@ -2484,9 +2610,9 @@
                 <a:ea typeface="Meiryo UI" pitchFamily="34" charset="-122"/>
                 <a:cs typeface="Meiryo UI" pitchFamily="34" charset="-120"/>
               </a:rPr>
-              <a:t>過去検討の時点から「変わった前提」— 更新するのはこの4つだけ</a:t>
-            </a:r>
-            <a:endParaRPr lang="en-US" sz="1000" dirty="0"/>
+              <a:t>当時から変わった前提は4つ — 更新するのはここだけ</a:t>
+            </a:r>
+            <a:endParaRPr lang="en-US" sz="1050" dirty="0"/>
           </a:p>
         </p:txBody>
       </p:sp>
@@ -2498,12 +2624,12 @@
         </p:nvSpPr>
         <p:spPr>
           <a:xfrm>
-            <a:off x="274320" y="4590288"/>
-            <a:ext cx="2843784" cy="1207008"/>
+            <a:off x="274320" y="4809744"/>
+            <a:ext cx="2843784" cy="1042416"/>
           </a:xfrm>
           <a:prstGeom prst="roundRect">
             <a:avLst>
-              <a:gd name="adj" fmla="val 4545"/>
+              <a:gd name="adj" fmla="val 5263"/>
             </a:avLst>
           </a:prstGeom>
           <a:solidFill>
@@ -2525,7 +2651,7 @@
         </p:nvSpPr>
         <p:spPr>
           <a:xfrm>
-            <a:off x="365760" y="4645152"/>
+            <a:off x="365760" y="4864608"/>
             <a:ext cx="2660904" cy="201168"/>
           </a:xfrm>
           <a:prstGeom prst="rect">
@@ -2542,7 +2668,7 @@
               <a:buNone/>
             </a:pPr>
             <a:r>
-              <a:rPr lang="en-US" sz="950" b="1" dirty="0">
+              <a:rPr lang="en-US" sz="1000" b="1" dirty="0">
                 <a:solidFill>
                   <a:srgbClr val="1F3D20"/>
                 </a:solidFill>
@@ -2552,7 +2678,7 @@
               </a:rPr>
               <a:t>技術</a:t>
             </a:r>
-            <a:endParaRPr lang="en-US" sz="950" dirty="0"/>
+            <a:endParaRPr lang="en-US" sz="1000" dirty="0"/>
           </a:p>
         </p:txBody>
       </p:sp>
@@ -2564,8 +2690,8 @@
         </p:nvSpPr>
         <p:spPr>
           <a:xfrm>
-            <a:off x="365760" y="4864608"/>
-            <a:ext cx="2660904" cy="896112"/>
+            <a:off x="365760" y="5084064"/>
+            <a:ext cx="2660904" cy="731520"/>
           </a:xfrm>
           <a:prstGeom prst="rect">
             <a:avLst/>
@@ -2579,12 +2705,12 @@
           <a:p>
             <a:pPr indent="0" marL="0">
               <a:lnSpc>
-                <a:spcPct val="108000"/>
+                <a:spcPct val="110000"/>
               </a:lnSpc>
               <a:buNone/>
             </a:pPr>
             <a:r>
-              <a:rPr lang="en-US" sz="730" dirty="0">
+              <a:rPr lang="en-US" sz="800" dirty="0">
                 <a:solidFill>
                   <a:srgbClr val="2B2B2B"/>
                 </a:solidFill>
@@ -2592,9 +2718,9 @@
                 <a:ea typeface="Meiryo UI" pitchFamily="34" charset="-122"/>
                 <a:cs typeface="Meiryo UI" pitchFamily="34" charset="-120"/>
               </a:rPr>
-              <a:t>フィジカルAI・画像AIの成熟とコスト低下。工場自身が31-7,8号でヒューマノイドを検討中 — 「1台1作業」前提の過去見積もりを無効化する</a:t>
-            </a:r>
-            <a:endParaRPr lang="en-US" sz="730" dirty="0"/>
+              <a:t>ロボット・画像AIが安く、賢くなった。工場自身も31-7,8号でヒューマノイドを検討中</a:t>
+            </a:r>
+            <a:endParaRPr lang="en-US" sz="800" dirty="0"/>
           </a:p>
         </p:txBody>
       </p:sp>
@@ -2606,12 +2732,12 @@
         </p:nvSpPr>
         <p:spPr>
           <a:xfrm>
-            <a:off x="3204972" y="4590288"/>
-            <a:ext cx="2843784" cy="1207008"/>
+            <a:off x="3204972" y="4809744"/>
+            <a:ext cx="2843784" cy="1042416"/>
           </a:xfrm>
           <a:prstGeom prst="roundRect">
             <a:avLst>
-              <a:gd name="adj" fmla="val 4545"/>
+              <a:gd name="adj" fmla="val 5263"/>
             </a:avLst>
           </a:prstGeom>
           <a:solidFill>
@@ -2633,7 +2759,7 @@
         </p:nvSpPr>
         <p:spPr>
           <a:xfrm>
-            <a:off x="3296412" y="4645152"/>
+            <a:off x="3296412" y="4864608"/>
             <a:ext cx="2660904" cy="201168"/>
           </a:xfrm>
           <a:prstGeom prst="rect">
@@ -2650,7 +2776,7 @@
               <a:buNone/>
             </a:pPr>
             <a:r>
-              <a:rPr lang="en-US" sz="950" b="1" dirty="0">
+              <a:rPr lang="en-US" sz="1000" b="1" dirty="0">
                 <a:solidFill>
                   <a:srgbClr val="1F3D20"/>
                 </a:solidFill>
@@ -2658,9 +2784,9 @@
                 <a:ea typeface="Meiryo UI" pitchFamily="34" charset="-122"/>
                 <a:cs typeface="Meiryo UI" pitchFamily="34" charset="-120"/>
               </a:rPr>
-              <a:t>経済</a:t>
-            </a:r>
-            <a:endParaRPr lang="en-US" sz="950" dirty="0"/>
+              <a:t>賃金</a:t>
+            </a:r>
+            <a:endParaRPr lang="en-US" sz="1000" dirty="0"/>
           </a:p>
         </p:txBody>
       </p:sp>
@@ -2672,8 +2798,8 @@
         </p:nvSpPr>
         <p:spPr>
           <a:xfrm>
-            <a:off x="3296412" y="4864608"/>
-            <a:ext cx="2660904" cy="896112"/>
+            <a:off x="3296412" y="5084064"/>
+            <a:ext cx="2660904" cy="731520"/>
           </a:xfrm>
           <a:prstGeom prst="rect">
             <a:avLst/>
@@ -2687,12 +2813,12 @@
           <a:p>
             <a:pPr indent="0" marL="0">
               <a:lnSpc>
-                <a:spcPct val="108000"/>
+                <a:spcPct val="110000"/>
               </a:lnSpc>
               <a:buNone/>
             </a:pPr>
             <a:r>
-              <a:rPr lang="en-US" sz="730" dirty="0">
+              <a:rPr lang="en-US" sz="800" dirty="0">
                 <a:solidFill>
                   <a:srgbClr val="2B2B2B"/>
                 </a:solidFill>
@@ -2700,9 +2826,9 @@
                 <a:ea typeface="Meiryo UI" pitchFamily="34" charset="-122"/>
                 <a:cs typeface="Meiryo UI" pitchFamily="34" charset="-120"/>
               </a:rPr>
-              <a:t>賃上げ5%台の継続 → 投資基準の分母(1名あたり人件費)が上昇。過去に基準超過で死んだ案件が同じ見積もりでも成立圏に入り得る</a:t>
-            </a:r>
-            <a:endParaRPr lang="en-US" sz="730" dirty="0"/>
+              <a:t>賃上げが続き、1名減らす価値が毎年上がっている。昔は基準オーバーだった案件が、今なら通り得る</a:t>
+            </a:r>
+            <a:endParaRPr lang="en-US" sz="800" dirty="0"/>
           </a:p>
         </p:txBody>
       </p:sp>
@@ -2714,12 +2840,12 @@
         </p:nvSpPr>
         <p:spPr>
           <a:xfrm>
-            <a:off x="6135624" y="4590288"/>
-            <a:ext cx="2843784" cy="1207008"/>
+            <a:off x="6135624" y="4809744"/>
+            <a:ext cx="2843784" cy="1042416"/>
           </a:xfrm>
           <a:prstGeom prst="roundRect">
             <a:avLst>
-              <a:gd name="adj" fmla="val 4545"/>
+              <a:gd name="adj" fmla="val 5263"/>
             </a:avLst>
           </a:prstGeom>
           <a:solidFill>
@@ -2741,7 +2867,7 @@
         </p:nvSpPr>
         <p:spPr>
           <a:xfrm>
-            <a:off x="6227064" y="4645152"/>
+            <a:off x="6227064" y="4864608"/>
             <a:ext cx="2660904" cy="201168"/>
           </a:xfrm>
           <a:prstGeom prst="rect">
@@ -2758,7 +2884,7 @@
               <a:buNone/>
             </a:pPr>
             <a:r>
-              <a:rPr lang="en-US" sz="950" b="1" dirty="0">
+              <a:rPr lang="en-US" sz="1000" b="1" dirty="0">
                 <a:solidFill>
                   <a:srgbClr val="1F3D20"/>
                 </a:solidFill>
@@ -2766,9 +2892,9 @@
                 <a:ea typeface="Meiryo UI" pitchFamily="34" charset="-122"/>
                 <a:cs typeface="Meiryo UI" pitchFamily="34" charset="-120"/>
               </a:rPr>
-              <a:t>目標水準</a:t>
-            </a:r>
-            <a:endParaRPr lang="en-US" sz="950" dirty="0"/>
+              <a:t>目標</a:t>
+            </a:r>
+            <a:endParaRPr lang="en-US" sz="1000" dirty="0"/>
           </a:p>
         </p:txBody>
       </p:sp>
@@ -2780,8 +2906,8 @@
         </p:nvSpPr>
         <p:spPr>
           <a:xfrm>
-            <a:off x="6227064" y="4864608"/>
-            <a:ext cx="2660904" cy="896112"/>
+            <a:off x="6227064" y="5084064"/>
+            <a:ext cx="2660904" cy="731520"/>
           </a:xfrm>
           <a:prstGeom prst="rect">
             <a:avLst/>
@@ -2795,12 +2921,12 @@
           <a:p>
             <a:pPr indent="0" marL="0">
               <a:lnSpc>
-                <a:spcPct val="108000"/>
+                <a:spcPct val="110000"/>
               </a:lnSpc>
               <a:buNone/>
             </a:pPr>
             <a:r>
-              <a:rPr lang="en-US" sz="730" dirty="0">
+              <a:rPr lang="en-US" sz="800" dirty="0">
                 <a:solidFill>
                   <a:srgbClr val="2B2B2B"/>
                 </a:solidFill>
@@ -2808,9 +2934,9 @@
                 <a:ea typeface="Meiryo UI" pitchFamily="34" charset="-122"/>
                 <a:cs typeface="Meiryo UI" pitchFamily="34" charset="-120"/>
               </a:rPr>
-              <a:t>役員期待が「115→100名」から「半減レベル」へ — 現行体制を最適とした前提条件(目標)自体が変わった</a:t>
-            </a:r>
-            <a:endParaRPr lang="en-US" sz="730" dirty="0"/>
+              <a:t>求められる水準が「15名減(115→100名)」から「半減」に変わった</a:t>
+            </a:r>
+            <a:endParaRPr lang="en-US" sz="800" dirty="0"/>
           </a:p>
         </p:txBody>
       </p:sp>
@@ -2822,12 +2948,12 @@
         </p:nvSpPr>
         <p:spPr>
           <a:xfrm>
-            <a:off x="9066276" y="4590288"/>
-            <a:ext cx="2843784" cy="1207008"/>
+            <a:off x="9066276" y="4809744"/>
+            <a:ext cx="2843784" cy="1042416"/>
           </a:xfrm>
           <a:prstGeom prst="roundRect">
             <a:avLst>
-              <a:gd name="adj" fmla="val 4545"/>
+              <a:gd name="adj" fmla="val 5263"/>
             </a:avLst>
           </a:prstGeom>
           <a:solidFill>
@@ -2849,7 +2975,7 @@
         </p:nvSpPr>
         <p:spPr>
           <a:xfrm>
-            <a:off x="9157716" y="4645152"/>
+            <a:off x="9157716" y="4864608"/>
             <a:ext cx="2660904" cy="201168"/>
           </a:xfrm>
           <a:prstGeom prst="rect">
@@ -2866,7 +2992,7 @@
               <a:buNone/>
             </a:pPr>
             <a:r>
-              <a:rPr lang="en-US" sz="950" b="1" dirty="0">
+              <a:rPr lang="en-US" sz="1000" b="1" dirty="0">
                 <a:solidFill>
                   <a:srgbClr val="1F3D20"/>
                 </a:solidFill>
@@ -2876,7 +3002,7 @@
               </a:rPr>
               <a:t>データ</a:t>
             </a:r>
-            <a:endParaRPr lang="en-US" sz="950" dirty="0"/>
+            <a:endParaRPr lang="en-US" sz="1000" dirty="0"/>
           </a:p>
         </p:txBody>
       </p:sp>
@@ -2888,8 +3014,8 @@
         </p:nvSpPr>
         <p:spPr>
           <a:xfrm>
-            <a:off x="9157716" y="4864608"/>
-            <a:ext cx="2660904" cy="896112"/>
+            <a:off x="9157716" y="5084064"/>
+            <a:ext cx="2660904" cy="731520"/>
           </a:xfrm>
           <a:prstGeom prst="rect">
             <a:avLst/>
@@ -2903,12 +3029,12 @@
           <a:p>
             <a:pPr indent="0" marL="0">
               <a:lnSpc>
-                <a:spcPct val="108000"/>
+                <a:spcPct val="110000"/>
               </a:lnSpc>
               <a:buNone/>
             </a:pPr>
             <a:r>
-              <a:rPr lang="en-US" sz="730" dirty="0">
+              <a:rPr lang="en-US" sz="800" dirty="0">
                 <a:solidFill>
                   <a:srgbClr val="2B2B2B"/>
                 </a:solidFill>
@@ -2916,9 +3042,9 @@
                 <a:ea typeface="Meiryo UI" pitchFamily="34" charset="-122"/>
                 <a:cs typeface="Meiryo UI" pitchFamily="34" charset="-120"/>
               </a:rPr>
-              <a:t>品質実績(クレーム・工程内不良)の蓄積により、検査33項目の統計的検証が過去より高い精度で可能に</a:t>
-            </a:r>
-            <a:endParaRPr lang="en-US" sz="730" dirty="0"/>
+              <a:t>クレーム・不良の実績データが貯まり、基準の妥当性を数字で確かめられるようになった</a:t>
+            </a:r>
+            <a:endParaRPr lang="en-US" sz="800" dirty="0"/>
           </a:p>
         </p:txBody>
       </p:sp>
@@ -2930,8 +3056,8 @@
         </p:nvSpPr>
         <p:spPr>
           <a:xfrm>
-            <a:off x="274320" y="5943600"/>
-            <a:ext cx="11640312" cy="237744"/>
+            <a:off x="274320" y="5998464"/>
+            <a:ext cx="11640312" cy="219456"/>
           </a:xfrm>
           <a:prstGeom prst="rect">
             <a:avLst/>
@@ -2947,7 +3073,7 @@
               <a:buNone/>
             </a:pPr>
             <a:r>
-              <a:rPr lang="en-US" sz="850" b="1" dirty="0">
+              <a:rPr lang="en-US" sz="900" b="1" dirty="0">
                 <a:solidFill>
                   <a:srgbClr val="2C5F2D"/>
                 </a:solidFill>
@@ -2955,9 +3081,9 @@
                 <a:ea typeface="Meiryo UI" pitchFamily="34" charset="-122"/>
                 <a:cs typeface="Meiryo UI" pitchFamily="34" charset="-120"/>
               </a:rPr>
-              <a:t>副次効果: 工場資料の要員構成・過去見積もり・スコープアウト理由は台帳(WBS 0.2/2.4)の初期データそのもの — 調査工数を大幅に圧縮できる(=「過去検討は資産」の実証)</a:t>
-            </a:r>
-            <a:endParaRPr lang="en-US" sz="850" dirty="0"/>
+              <a:t>おまけの効果: 工場資料にある要員表・見積もり・判断理由は、そのまま調査の初期データになる。調査の手間はその分小さくなる。</a:t>
+            </a:r>
+            <a:endParaRPr lang="en-US" sz="900" dirty="0"/>
           </a:p>
         </p:txBody>
       </p:sp>
@@ -2969,7 +3095,7 @@
         </p:nvSpPr>
         <p:spPr>
           <a:xfrm>
-            <a:off x="274320" y="6327648"/>
+            <a:off x="274320" y="6345936"/>
             <a:ext cx="11640312" cy="201168"/>
           </a:xfrm>
           <a:prstGeom prst="rect">
@@ -2994,7 +3120,7 @@
                 <a:ea typeface="Meiryo UI" pitchFamily="34" charset="-122"/>
                 <a:cs typeface="Meiryo UI" pitchFamily="34" charset="-120"/>
               </a:rPr>
-              <a:t>出典: 明工・生技G「生産性向上検討(自動化・自律化検討)に向けた打合せ」(2026/8/27)・BPR資料 ※数値は工場資料より</a:t>
+              <a:t>出典: 明工・生技G「生産性向上検討(自動化・自律化検討)に向けた打合せ」(2026/8/27) ※数値は工場資料より</a:t>
             </a:r>
             <a:endParaRPr lang="en-US" sz="650" dirty="0"/>
           </a:p>
@@ -3041,7 +3167,7 @@
         <p:spPr>
           <a:xfrm>
             <a:off x="274320" y="91440"/>
-            <a:ext cx="9144000" cy="384048"/>
+            <a:ext cx="10058400" cy="384048"/>
           </a:xfrm>
           <a:prstGeom prst="rect">
             <a:avLst/>
@@ -3057,7 +3183,7 @@
               <a:buNone/>
             </a:pPr>
             <a:r>
-              <a:rPr lang="en-US" sz="1700" b="1" dirty="0">
+              <a:rPr lang="en-US" sz="1800" b="1" dirty="0">
                 <a:solidFill>
                   <a:srgbClr val="1F3D20"/>
                 </a:solidFill>
@@ -3065,9 +3191,9 @@
                 <a:ea typeface="Meiryo UI" pitchFamily="34" charset="-122"/>
                 <a:cs typeface="Meiryo UI" pitchFamily="34" charset="-120"/>
               </a:rPr>
-              <a:t>検査 — 主打ち手は自動検査機(工場見解と一致)</a:t>
-            </a:r>
-            <a:endParaRPr lang="en-US" sz="1700" dirty="0"/>
+              <a:t>検査 — 主役は自動検査機。基準の確認は、その下ごしらえ</a:t>
+            </a:r>
+            <a:endParaRPr lang="en-US" sz="1800" dirty="0"/>
           </a:p>
         </p:txBody>
       </p:sp>
@@ -3126,7 +3252,7 @@
               <a:buNone/>
             </a:pPr>
             <a:r>
-              <a:rPr lang="en-US" sz="1050" b="1" dirty="0">
+              <a:rPr lang="en-US" sz="1100" b="1" dirty="0">
                 <a:solidFill>
                   <a:srgbClr val="FFFFFF"/>
                 </a:solidFill>
@@ -3134,7 +3260,7 @@
                 <a:ea typeface="Meiryo UI" pitchFamily="34" charset="-122"/>
                 <a:cs typeface="Meiryo UI" pitchFamily="34" charset="-120"/>
               </a:rPr>
-              <a:t>「検査機の開発・導入がクリティカルに効く」— 同意。</a:t>
+              <a:t>「検査機の開発・導入がクリティカルに効く」— その通り。</a:t>
             </a:r>
             <a:pPr indent="0" marL="0">
               <a:lnSpc>
@@ -3143,7 +3269,7 @@
               <a:buNone/>
             </a:pPr>
             <a:r>
-              <a:rPr lang="en-US" sz="1050" dirty="0">
+              <a:rPr lang="en-US" sz="1100" dirty="0">
                 <a:solidFill>
                   <a:srgbClr val="FFFFFF"/>
                 </a:solidFill>
@@ -3151,9 +3277,9 @@
                 <a:ea typeface="Meiryo UI" pitchFamily="34" charset="-122"/>
                 <a:cs typeface="Meiryo UI" pitchFamily="34" charset="-120"/>
               </a:rPr>
-              <a:t>基準見直しの役割は人を減らすことではなく、検査機の要求仕様を絞り、開発を早く・安く・確実に成立させる「前処理」である。</a:t>
-            </a:r>
-            <a:endParaRPr lang="en-US" sz="1050" dirty="0"/>
+              <a:t>基準の見直しは人を減らす手段ではない。検査機に求める仕様を軽くして、開発を早く・安く・確実にするための準備である。</a:t>
+            </a:r>
+            <a:endParaRPr lang="en-US" sz="1100" dirty="0"/>
           </a:p>
         </p:txBody>
       </p:sp>
@@ -3209,7 +3335,7 @@
               <a:buNone/>
             </a:pPr>
             <a:r>
-              <a:rPr lang="en-US" sz="1050" b="1" dirty="0">
+              <a:rPr lang="en-US" sz="1100" b="1" dirty="0">
                 <a:solidFill>
                   <a:srgbClr val="1F3D20"/>
                 </a:solidFill>
@@ -3217,9 +3343,9 @@
                 <a:ea typeface="Meiryo UI" pitchFamily="34" charset="-122"/>
                 <a:cs typeface="Meiryo UI" pitchFamily="34" charset="-120"/>
               </a:rPr>
-              <a:t>現状ファクト(工場資料より)</a:t>
-            </a:r>
-            <a:endParaRPr lang="en-US" sz="1050" dirty="0"/>
+              <a:t>いまの状況(工場資料より)</a:t>
+            </a:r>
+            <a:endParaRPr lang="en-US" sz="1100" dirty="0"/>
           </a:p>
         </p:txBody>
       </p:sp>
@@ -3246,12 +3372,12 @@
           <a:p>
             <a:pPr indent="0" marL="0">
               <a:lnSpc>
-                <a:spcPct val="112000"/>
+                <a:spcPct val="115000"/>
               </a:lnSpc>
               <a:buNone/>
             </a:pPr>
             <a:r>
-              <a:rPr lang="en-US" sz="1300" b="1" dirty="0">
+              <a:rPr lang="en-US" sz="1400" b="1" dirty="0">
                 <a:solidFill>
                   <a:srgbClr val="1F3D20"/>
                 </a:solidFill>
@@ -3259,17 +3385,17 @@
                 <a:ea typeface="Meiryo UI" pitchFamily="34" charset="-122"/>
                 <a:cs typeface="Meiryo UI" pitchFamily="34" charset="-120"/>
               </a:rPr>
-              <a:t>植毛の不良項目 全33項目
+              <a:t>不良の種類は全部で33
 </a:t>
             </a:r>
             <a:pPr indent="0" marL="0">
               <a:lnSpc>
-                <a:spcPct val="112000"/>
+                <a:spcPct val="115000"/>
               </a:lnSpc>
               <a:buNone/>
             </a:pPr>
             <a:r>
-              <a:rPr lang="en-US" sz="850" dirty="0">
+              <a:rPr lang="en-US" sz="900" dirty="0">
                 <a:solidFill>
                   <a:srgbClr val="2B2B2B"/>
                 </a:solidFill>
@@ -3277,17 +3403,17 @@
                 <a:ea typeface="Meiryo UI" pitchFamily="34" charset="-122"/>
                 <a:cs typeface="Meiryo UI" pitchFamily="34" charset="-120"/>
               </a:rPr>
-              <a:t>うち 18項目 = 設備で流出防止済み(画像処理/センシング)
+              <a:t>・18種類 → すでに機械で検出できている
 </a:t>
             </a:r>
             <a:pPr indent="0" marL="0">
               <a:lnSpc>
-                <a:spcPct val="112000"/>
+                <a:spcPct val="115000"/>
               </a:lnSpc>
               <a:buNone/>
             </a:pPr>
             <a:r>
-              <a:rPr lang="en-US" sz="1000" b="1" dirty="0">
+              <a:rPr lang="en-US" sz="1050" b="1" dirty="0">
                 <a:solidFill>
                   <a:srgbClr val="B85042"/>
                 </a:solidFill>
@@ -3295,17 +3421,17 @@
                 <a:ea typeface="Meiryo UI" pitchFamily="34" charset="-122"/>
                 <a:cs typeface="Meiryo UI" pitchFamily="34" charset="-120"/>
               </a:rPr>
-              <a:t>うち 15項目(45%) = 抜き取り検査のみ
+              <a:t>・15種類(45%) → 人の抜き取り検査だけ
 </a:t>
             </a:r>
             <a:pPr indent="0" marL="0">
               <a:lnSpc>
-                <a:spcPct val="112000"/>
+                <a:spcPct val="115000"/>
               </a:lnSpc>
               <a:buNone/>
             </a:pPr>
             <a:r>
-              <a:rPr lang="en-US" sz="850" i="1" dirty="0">
+              <a:rPr lang="en-US" sz="900" i="1" dirty="0">
                 <a:solidFill>
                   <a:srgbClr val="2B2B2B"/>
                 </a:solidFill>
@@ -3314,26 +3440,26 @@
                 <a:cs typeface="Meiryo UI" pitchFamily="34" charset="-120"/>
               </a:rPr>
               <a:t>
-工場資料の記載: 「全33項目検査可能な仕様で検討が必要」
+工場の案: 33種類すべてを検出できる検査機を検討
 </a:t>
             </a:r>
             <a:pPr indent="0" marL="0">
               <a:lnSpc>
-                <a:spcPct val="112000"/>
+                <a:spcPct val="115000"/>
               </a:lnSpc>
               <a:buNone/>
             </a:pPr>
-            <a:endParaRPr lang="en-US" sz="1300" dirty="0"/>
+            <a:endParaRPr lang="en-US" sz="1400" dirty="0"/>
           </a:p>
           <a:p>
             <a:pPr indent="0" marL="0">
               <a:lnSpc>
-                <a:spcPct val="112000"/>
+                <a:spcPct val="115000"/>
               </a:lnSpc>
               <a:buNone/>
             </a:pPr>
             <a:r>
-              <a:rPr lang="en-US" sz="850" b="1" dirty="0">
+              <a:rPr lang="en-US" sz="900" b="1" dirty="0">
                 <a:solidFill>
                   <a:srgbClr val="B85042"/>
                 </a:solidFill>
@@ -3341,9 +3467,9 @@
                 <a:ea typeface="Meiryo UI" pitchFamily="34" charset="-122"/>
                 <a:cs typeface="Meiryo UI" pitchFamily="34" charset="-120"/>
               </a:rPr>
-              <a:t>リスク: 33項目フル仕様は開発難度・費用・期間を最大化し、過去3案件と同じ死に方(投資基準超過)をする恐れ</a:t>
-            </a:r>
-            <a:endParaRPr lang="en-US" sz="1300" dirty="0"/>
+              <a:t>心配な点: 33種類フル対応の検査機は、高く・難しく・時間がかかる。過去3案件と同じく、投資基準で止まる恐れがある</a:t>
+            </a:r>
+            <a:endParaRPr lang="en-US" sz="1400" dirty="0"/>
           </a:p>
         </p:txBody>
       </p:sp>
@@ -3372,7 +3498,7 @@
               <a:buNone/>
             </a:pPr>
             <a:r>
-              <a:rPr lang="en-US" sz="1050" b="1" dirty="0">
+              <a:rPr lang="en-US" sz="1100" b="1" dirty="0">
                 <a:solidFill>
                   <a:srgbClr val="1F3D20"/>
                 </a:solidFill>
@@ -3380,9 +3506,9 @@
                 <a:ea typeface="Meiryo UI" pitchFamily="34" charset="-122"/>
                 <a:cs typeface="Meiryo UI" pitchFamily="34" charset="-120"/>
               </a:rPr>
-              <a:t>進め方 — 検査機開発の「前処理」として基準を検証する</a:t>
-            </a:r>
-            <a:endParaRPr lang="en-US" sz="1050" dirty="0"/>
+              <a:t>進め方 — 検査機の仕様を決める前に、4つのステップを踏む</a:t>
+            </a:r>
+            <a:endParaRPr lang="en-US" sz="1100" dirty="0"/>
           </a:p>
         </p:txBody>
       </p:sp>
@@ -3438,7 +3564,7 @@
               <a:buNone/>
             </a:pPr>
             <a:r>
-              <a:rPr lang="en-US" sz="800" b="1" dirty="0">
+              <a:rPr lang="en-US" sz="850" b="1" dirty="0">
                 <a:solidFill>
                   <a:srgbClr val="B85042"/>
                 </a:solidFill>
@@ -3448,7 +3574,7 @@
               </a:rPr>
               <a:t>STEP 1</a:t>
             </a:r>
-            <a:endParaRPr lang="en-US" sz="800" dirty="0"/>
+            <a:endParaRPr lang="en-US" sz="850" dirty="0"/>
           </a:p>
         </p:txBody>
       </p:sp>
@@ -3488,7 +3614,7 @@
                 <a:ea typeface="Meiryo UI" pitchFamily="34" charset="-122"/>
                 <a:cs typeface="Meiryo UI" pitchFamily="34" charset="-120"/>
               </a:rPr>
-              <a:t>15項目×品質実績の突合</a:t>
+              <a:t>実績と突き合わせる</a:t>
             </a:r>
             <a:endParaRPr lang="en-US" sz="950" dirty="0"/>
           </a:p>
@@ -3517,12 +3643,12 @@
           <a:p>
             <a:pPr indent="0" marL="0">
               <a:lnSpc>
-                <a:spcPct val="108000"/>
+                <a:spcPct val="110000"/>
               </a:lnSpc>
               <a:buNone/>
             </a:pPr>
             <a:r>
-              <a:rPr lang="en-US" sz="720" dirty="0">
+              <a:rPr lang="en-US" sz="760" dirty="0">
                 <a:solidFill>
                   <a:srgbClr val="2B2B2B"/>
                 </a:solidFill>
@@ -3530,9 +3656,9 @@
                 <a:ea typeface="Meiryo UI" pitchFamily="34" charset="-122"/>
                 <a:cs typeface="Meiryo UI" pitchFamily="34" charset="-120"/>
               </a:rPr>
-              <a:t>各項目の市場クレーム実績・工程内検出率・重篤度を並べる(1〜2か月・投資ゼロ。品質保証+工場QA)</a:t>
-            </a:r>
-            <a:endParaRPr lang="en-US" sz="720" dirty="0"/>
+              <a:t>15種類それぞれについて「実際に市場へ流出したことがあるか・どれだけ重大か」を数字で確認する(1〜2か月・費用ゼロ。品質保証+工場QA)</a:t>
+            </a:r>
+            <a:endParaRPr lang="en-US" sz="760" dirty="0"/>
           </a:p>
         </p:txBody>
       </p:sp>
@@ -3627,7 +3753,7 @@
               <a:buNone/>
             </a:pPr>
             <a:r>
-              <a:rPr lang="en-US" sz="800" b="1" dirty="0">
+              <a:rPr lang="en-US" sz="850" b="1" dirty="0">
                 <a:solidFill>
                   <a:srgbClr val="B85042"/>
                 </a:solidFill>
@@ -3637,7 +3763,7 @@
               </a:rPr>
               <a:t>STEP 2</a:t>
             </a:r>
-            <a:endParaRPr lang="en-US" sz="800" dirty="0"/>
+            <a:endParaRPr lang="en-US" sz="850" dirty="0"/>
           </a:p>
         </p:txBody>
       </p:sp>
@@ -3677,7 +3803,7 @@
                 <a:ea typeface="Meiryo UI" pitchFamily="34" charset="-122"/>
                 <a:cs typeface="Meiryo UI" pitchFamily="34" charset="-120"/>
               </a:rPr>
-              <a:t>3つに仕分け</a:t>
+              <a:t>3つに分ける</a:t>
             </a:r>
             <a:endParaRPr lang="en-US" sz="950" dirty="0"/>
           </a:p>
@@ -3706,12 +3832,12 @@
           <a:p>
             <a:pPr indent="0" marL="0">
               <a:lnSpc>
-                <a:spcPct val="108000"/>
+                <a:spcPct val="110000"/>
               </a:lnSpc>
               <a:buNone/>
             </a:pPr>
             <a:r>
-              <a:rPr lang="en-US" sz="720" dirty="0">
+              <a:rPr lang="en-US" sz="760" dirty="0">
                 <a:solidFill>
                   <a:srgbClr val="2B2B2B"/>
                 </a:solidFill>
@@ -3719,9 +3845,49 @@
                 <a:ea typeface="Meiryo UI" pitchFamily="34" charset="-122"/>
                 <a:cs typeface="Meiryo UI" pitchFamily="34" charset="-120"/>
               </a:rPr>
-              <a:t>(a)流出実績あり重篤→検査機の必須仕様 (b)実績僅少・軽微→統計的管理で代替可否をQAが判定 (c)上流の工程条件で発生源を潰せる→検査不要化</a:t>
-            </a:r>
-            <a:endParaRPr lang="en-US" sz="720" dirty="0"/>
+              <a:t>(a)流出実績があり重大 → 検査機で必ず検出</a:t>
+            </a:r>
+            <a:endParaRPr lang="en-US" sz="760" dirty="0"/>
+          </a:p>
+          <a:p>
+            <a:pPr indent="0" marL="0">
+              <a:lnSpc>
+                <a:spcPct val="110000"/>
+              </a:lnSpc>
+              <a:buNone/>
+            </a:pPr>
+            <a:r>
+              <a:rPr lang="en-US" sz="760" dirty="0">
+                <a:solidFill>
+                  <a:srgbClr val="2B2B2B"/>
+                </a:solidFill>
+                <a:latin typeface="Meiryo UI" pitchFamily="34" charset="0"/>
+                <a:ea typeface="Meiryo UI" pitchFamily="34" charset="-122"/>
+                <a:cs typeface="Meiryo UI" pitchFamily="34" charset="-120"/>
+              </a:rPr>
+              <a:t>(b)ほとんど起きない・軽微 → 統計管理で足りるかQAが判断</a:t>
+            </a:r>
+            <a:endParaRPr lang="en-US" sz="760" dirty="0"/>
+          </a:p>
+          <a:p>
+            <a:pPr indent="0" marL="0">
+              <a:lnSpc>
+                <a:spcPct val="110000"/>
+              </a:lnSpc>
+              <a:buNone/>
+            </a:pPr>
+            <a:r>
+              <a:rPr lang="en-US" sz="760" dirty="0">
+                <a:solidFill>
+                  <a:srgbClr val="2B2B2B"/>
+                </a:solidFill>
+                <a:latin typeface="Meiryo UI" pitchFamily="34" charset="0"/>
+                <a:ea typeface="Meiryo UI" pitchFamily="34" charset="-122"/>
+                <a:cs typeface="Meiryo UI" pitchFamily="34" charset="-120"/>
+              </a:rPr>
+              <a:t>(c)発生源を工程で潰せる → 検査自体が不要に</a:t>
+            </a:r>
+            <a:endParaRPr lang="en-US" sz="760" dirty="0"/>
           </a:p>
         </p:txBody>
       </p:sp>
@@ -3816,7 +3982,7 @@
               <a:buNone/>
             </a:pPr>
             <a:r>
-              <a:rPr lang="en-US" sz="800" b="1" dirty="0">
+              <a:rPr lang="en-US" sz="850" b="1" dirty="0">
                 <a:solidFill>
                   <a:srgbClr val="B85042"/>
                 </a:solidFill>
@@ -3826,7 +3992,7 @@
               </a:rPr>
               <a:t>STEP 3</a:t>
             </a:r>
-            <a:endParaRPr lang="en-US" sz="800" dirty="0"/>
+            <a:endParaRPr lang="en-US" sz="850" dirty="0"/>
           </a:p>
         </p:txBody>
       </p:sp>
@@ -3866,7 +4032,7 @@
                 <a:ea typeface="Meiryo UI" pitchFamily="34" charset="-122"/>
                 <a:cs typeface="Meiryo UI" pitchFamily="34" charset="-120"/>
               </a:rPr>
-              <a:t>検査機仕様の凍結</a:t>
+              <a:t>検査機の仕様を確定</a:t>
             </a:r>
             <a:endParaRPr lang="en-US" sz="950" dirty="0"/>
           </a:p>
@@ -3895,12 +4061,12 @@
           <a:p>
             <a:pPr indent="0" marL="0">
               <a:lnSpc>
-                <a:spcPct val="108000"/>
+                <a:spcPct val="110000"/>
               </a:lnSpc>
               <a:buNone/>
             </a:pPr>
             <a:r>
-              <a:rPr lang="en-US" sz="720" dirty="0">
+              <a:rPr lang="en-US" sz="760" dirty="0">
                 <a:solidFill>
                   <a:srgbClr val="2B2B2B"/>
                 </a:solidFill>
@@ -3908,9 +4074,9 @@
                 <a:ea typeface="Meiryo UI" pitchFamily="34" charset="-122"/>
                 <a:cs typeface="Meiryo UI" pitchFamily="34" charset="-120"/>
               </a:rPr>
-              <a:t>必須仕様を33→(例)25項目前後に絞り込み — 開発資源を本当に必要な項目へ集中</a:t>
-            </a:r>
-            <a:endParaRPr lang="en-US" sz="720" dirty="0"/>
+              <a:t>「必ず検出すべき項目」だけに絞って仕様を決める(例: 33→25種類)。開発の力を本当に必要な項目へ集中</a:t>
+            </a:r>
+            <a:endParaRPr lang="en-US" sz="760" dirty="0"/>
           </a:p>
         </p:txBody>
       </p:sp>
@@ -4005,7 +4171,7 @@
               <a:buNone/>
             </a:pPr>
             <a:r>
-              <a:rPr lang="en-US" sz="800" b="1" dirty="0">
+              <a:rPr lang="en-US" sz="850" b="1" dirty="0">
                 <a:solidFill>
                   <a:srgbClr val="D8E8D4"/>
                 </a:solidFill>
@@ -4015,7 +4181,7 @@
               </a:rPr>
               <a:t>STEP 4</a:t>
             </a:r>
-            <a:endParaRPr lang="en-US" sz="800" dirty="0"/>
+            <a:endParaRPr lang="en-US" sz="850" dirty="0"/>
           </a:p>
         </p:txBody>
       </p:sp>
@@ -4055,7 +4221,7 @@
                 <a:ea typeface="Meiryo UI" pitchFamily="34" charset="-122"/>
                 <a:cs typeface="Meiryo UI" pitchFamily="34" charset="-120"/>
               </a:rPr>
-              <a:t>開発・並行運転</a:t>
+              <a:t>開発・実証</a:t>
             </a:r>
             <a:endParaRPr lang="en-US" sz="950" dirty="0"/>
           </a:p>
@@ -4084,12 +4250,12 @@
           <a:p>
             <a:pPr indent="0" marL="0">
               <a:lnSpc>
-                <a:spcPct val="108000"/>
+                <a:spcPct val="110000"/>
               </a:lnSpc>
               <a:buNone/>
             </a:pPr>
             <a:r>
-              <a:rPr lang="en-US" sz="720" dirty="0">
+              <a:rPr lang="en-US" sz="760" dirty="0">
                 <a:solidFill>
                   <a:srgbClr val="FFFFFF"/>
                 </a:solidFill>
@@ -4097,9 +4263,9 @@
                 <a:ea typeface="Meiryo UI" pitchFamily="34" charset="-122"/>
                 <a:cs typeface="Meiryo UI" pitchFamily="34" charset="-120"/>
               </a:rPr>
-              <a:t>目視との検出力比較(いずれ必須の検証)。見逃し率ベースライン測定を先行させる</a:t>
-            </a:r>
-            <a:endParaRPr lang="en-US" sz="720" dirty="0"/>
+              <a:t>人の目視と並べて動かし、検出力を比較する(どのみち導入時に必要な検証)。目視の見逃し率の測定を先に始めておく</a:t>
+            </a:r>
+            <a:endParaRPr lang="en-US" sz="760" dirty="0"/>
           </a:p>
         </p:txBody>
       </p:sp>
@@ -4158,7 +4324,7 @@
               <a:buNone/>
             </a:pPr>
             <a:r>
-              <a:rPr lang="en-US" sz="1050" b="1" dirty="0">
+              <a:rPr lang="en-US" sz="1100" b="1" dirty="0">
                 <a:solidFill>
                   <a:srgbClr val="B85042"/>
                 </a:solidFill>
@@ -4166,7 +4332,7 @@
                 <a:ea typeface="Meiryo UI" pitchFamily="34" charset="-122"/>
                 <a:cs typeface="Meiryo UI" pitchFamily="34" charset="-120"/>
               </a:rPr>
-              <a:t>「基準か、検査機か」の二択ではない。「基準検証 → 仕様凍結 → 開発」の順序の話である。
+              <a:t>「基準か、検査機か」の二択ではない。「基準を確かめる → 仕様を決める → 開発する」という順番の話。
 </a:t>
             </a:r>
             <a:pPr indent="0" marL="0">
@@ -4176,7 +4342,7 @@
               <a:buNone/>
             </a:pPr>
             <a:r>
-              <a:rPr lang="en-US" sz="880" dirty="0">
+              <a:rPr lang="en-US" sz="950" dirty="0">
                 <a:solidFill>
                   <a:srgbClr val="2B2B2B"/>
                 </a:solidFill>
@@ -4184,9 +4350,9 @@
                 <a:ea typeface="Meiryo UI" pitchFamily="34" charset="-122"/>
                 <a:cs typeface="Meiryo UI" pitchFamily="34" charset="-120"/>
               </a:rPr>
-              <a:t>基準見直しは検査機の代替ではなく成立条件 — 仕様が軽くなるほど、検査機は投資基準を通りやすくなる。</a:t>
-            </a:r>
-            <a:endParaRPr lang="en-US" sz="1050" dirty="0"/>
+              <a:t>仕様が軽くなるほど、検査機は投資基準を通りやすくなる。</a:t>
+            </a:r>
+            <a:endParaRPr lang="en-US" sz="1100" dirty="0"/>
           </a:p>
         </p:txBody>
       </p:sp>
@@ -4199,11 +4365,11 @@
         <p:spPr>
           <a:xfrm>
             <a:off x="274320" y="5166360"/>
-            <a:ext cx="11640312" cy="777240"/>
+            <a:ext cx="11640312" cy="713232"/>
           </a:xfrm>
           <a:prstGeom prst="roundRect">
             <a:avLst>
-              <a:gd name="adj" fmla="val 7059"/>
+              <a:gd name="adj" fmla="val 7692"/>
             </a:avLst>
           </a:prstGeom>
           <a:solidFill>
@@ -4226,7 +4392,7 @@
         <p:spPr>
           <a:xfrm>
             <a:off x="420624" y="5166360"/>
-            <a:ext cx="11338560" cy="777240"/>
+            <a:ext cx="11338560" cy="713232"/>
           </a:xfrm>
           <a:prstGeom prst="rect">
             <a:avLst/>
@@ -4245,7 +4411,7 @@
               <a:buNone/>
             </a:pPr>
             <a:r>
-              <a:rPr lang="en-US" sz="950" b="1" dirty="0">
+              <a:rPr lang="en-US" sz="1000" b="1" dirty="0">
                 <a:solidFill>
                   <a:srgbClr val="1F3D20"/>
                 </a:solidFill>
@@ -4253,7 +4419,7 @@
                 <a:ea typeface="Meiryo UI" pitchFamily="34" charset="-122"/>
                 <a:cs typeface="Meiryo UI" pitchFamily="34" charset="-120"/>
               </a:rPr>
-              <a:t>本件の効果計上について: </a:t>
+              <a:t>念のための確認: </a:t>
             </a:r>
             <a:pPr indent="0" marL="0">
               <a:lnSpc>
@@ -4262,7 +4428,7 @@
               <a:buNone/>
             </a:pPr>
             <a:r>
-              <a:rPr lang="en-US" sz="860" dirty="0">
+              <a:rPr lang="en-US" sz="930" dirty="0">
                 <a:solidFill>
                   <a:srgbClr val="2B2B2B"/>
                 </a:solidFill>
@@ -4270,9 +4436,9 @@
                 <a:ea typeface="Meiryo UI" pitchFamily="34" charset="-122"/>
                 <a:cs typeface="Meiryo UI" pitchFamily="34" charset="-120"/>
               </a:rPr>
-              <a:t>BPRフレームでも検査の省人化効果の主体は③(自動検査機)に計上しており、「基準見直し単独で検査の人が減る」とは主張していない。基準見直し(①)の直接効果は記録・点検等の管理業務が中心で、検査領域における①の価値は「③の投資成立性を高めること」にある。</a:t>
-            </a:r>
-            <a:endParaRPr lang="en-US" sz="950" dirty="0"/>
+              <a:t>「基準の見直しだけで検査の人が減る」とは考えていない。検査の省人化効果は自動検査機の側に計上している。基準見直しの価値は、その検査機を成立させることにある。</a:t>
+            </a:r>
+            <a:endParaRPr lang="en-US" sz="1000" dirty="0"/>
           </a:p>
         </p:txBody>
       </p:sp>
@@ -4284,7 +4450,7 @@
         </p:nvSpPr>
         <p:spPr>
           <a:xfrm>
-            <a:off x="274320" y="6327648"/>
+            <a:off x="274320" y="6345936"/>
             <a:ext cx="11640312" cy="201168"/>
           </a:xfrm>
           <a:prstGeom prst="rect">
@@ -4309,7 +4475,7 @@
                 <a:ea typeface="Meiryo UI" pitchFamily="34" charset="-122"/>
                 <a:cs typeface="Meiryo UI" pitchFamily="34" charset="-120"/>
               </a:rPr>
-              <a:t>出典: 明工・生技G資料(2026/8/27)スライド8(不良33項目の内訳)・BPR資料 ※仕分けの結論は品質保証・工場QAの共同検証で確定</a:t>
+              <a:t>出典: 明工・生技G資料(2026/8/27)スライド8(不良33項目の内訳) ※どの項目をどう分けるかは、品質保証・工場QAの共同検証で決める</a:t>
             </a:r>
             <a:endParaRPr lang="en-US" sz="650" dirty="0"/>
           </a:p>
@@ -4372,7 +4538,7 @@
               <a:buNone/>
             </a:pPr>
             <a:r>
-              <a:rPr lang="en-US" sz="1700" b="1" dirty="0">
+              <a:rPr lang="en-US" sz="1800" b="1" dirty="0">
                 <a:solidFill>
                   <a:srgbClr val="1F3D20"/>
                 </a:solidFill>
@@ -4380,9 +4546,9 @@
                 <a:ea typeface="Meiryo UI" pitchFamily="34" charset="-122"/>
                 <a:cs typeface="Meiryo UI" pitchFamily="34" charset="-120"/>
               </a:rPr>
-              <a:t>工程×BPRマッピングと意見交換の進め方</a:t>
-            </a:r>
-            <a:endParaRPr lang="en-US" sz="1700" dirty="0"/>
+              <a:t>工程ごとの整理と、当日の進め方</a:t>
+            </a:r>
+            <a:endParaRPr lang="en-US" sz="1800" dirty="0"/>
           </a:p>
         </p:txBody>
       </p:sp>
@@ -4411,7 +4577,7 @@
               <a:buNone/>
             </a:pPr>
             <a:r>
-              <a:rPr lang="en-US" sz="950" b="1" dirty="0">
+              <a:rPr lang="en-US" sz="1000" b="1" dirty="0">
                 <a:solidFill>
                   <a:srgbClr val="B85042"/>
                 </a:solidFill>
@@ -4419,9 +4585,9 @@
                 <a:ea typeface="Meiryo UI" pitchFamily="34" charset="-122"/>
                 <a:cs typeface="Meiryo UI" pitchFamily="34" charset="-120"/>
               </a:rPr>
-              <a:t>工場提示スコープ: 供給・箱詰め 約43名+検査 約23名 = 約66名(75%目標→約50名規模)</a:t>
-            </a:r>
-            <a:endParaRPr lang="en-US" sz="950" dirty="0"/>
+              <a:t>対象(工場提示): 供給・箱詰め 約43名 + 検査 約23名 = 約66名(75%目標 → 約50名規模)</a:t>
+            </a:r>
+            <a:endParaRPr lang="en-US" sz="1000" dirty="0"/>
           </a:p>
         </p:txBody>
       </p:sp>
@@ -4463,7 +4629,7 @@
                         <a:buNone/>
                       </a:pPr>
                       <a:r>
-                        <a:rPr lang="en-US" sz="800" b="1" dirty="0">
+                        <a:rPr lang="en-US" sz="850" b="1" dirty="0">
                           <a:solidFill>
                             <a:srgbClr val="FFFFFF"/>
                           </a:solidFill>
@@ -4471,16 +4637,16 @@
                           <a:ea typeface="Meiryo UI" pitchFamily="34" charset="-122"/>
                           <a:cs typeface="Meiryo UI" pitchFamily="34" charset="-120"/>
                         </a:rPr>
-                        <a:t>工程クラスタ(工場提示)</a:t>
+                        <a:t>工程(工場提示)</a:t>
                       </a:r>
-                      <a:endParaRPr lang="en-US" sz="800" dirty="0">
+                      <a:endParaRPr lang="en-US" sz="850" dirty="0">
                         <a:latin typeface="Meiryo UI" charset="0"/>
                         <a:ea typeface="Meiryo UI" charset="0"/>
                         <a:cs typeface="Meiryo UI" charset="0"/>
                       </a:endParaRPr>
                     </a:p>
                   </a:txBody>
-                  <a:tcPr marL="45720" marR="45720" marT="45720" marB="45720" anchor="ctr">
+                  <a:tcPr marL="54864" marR="54864" marT="54864" marB="54864" anchor="ctr">
                     <a:lnL w="6350" cap="flat" cmpd="sng" algn="ctr">
                       <a:solidFill>
                         <a:srgbClr val="D3DED0"/>
@@ -4531,7 +4697,7 @@
                         <a:buNone/>
                       </a:pPr>
                       <a:r>
-                        <a:rPr lang="en-US" sz="800" b="1" dirty="0">
+                        <a:rPr lang="en-US" sz="850" b="1" dirty="0">
                           <a:solidFill>
                             <a:srgbClr val="FFFFFF"/>
                           </a:solidFill>
@@ -4539,16 +4705,16 @@
                           <a:ea typeface="Meiryo UI" pitchFamily="34" charset="-122"/>
                           <a:cs typeface="Meiryo UI" pitchFamily="34" charset="-120"/>
                         </a:rPr>
-                        <a:t>① 無くす(基準・資材仕様に遡る)</a:t>
+                        <a:t>① 無くせないか(基準・資材のルール側で)</a:t>
                       </a:r>
-                      <a:endParaRPr lang="en-US" sz="800" dirty="0">
+                      <a:endParaRPr lang="en-US" sz="850" dirty="0">
                         <a:latin typeface="Meiryo UI" charset="0"/>
                         <a:ea typeface="Meiryo UI" charset="0"/>
                         <a:cs typeface="Meiryo UI" charset="0"/>
                       </a:endParaRPr>
                     </a:p>
                   </a:txBody>
-                  <a:tcPr marL="45720" marR="45720" marT="45720" marB="45720" anchor="ctr">
+                  <a:tcPr marL="54864" marR="54864" marT="54864" marB="54864" anchor="ctr">
                     <a:lnL w="6350" cap="flat" cmpd="sng" algn="ctr">
                       <a:solidFill>
                         <a:srgbClr val="D3DED0"/>
@@ -4599,7 +4765,7 @@
                         <a:buNone/>
                       </a:pPr>
                       <a:r>
-                        <a:rPr lang="en-US" sz="800" b="1" dirty="0">
+                        <a:rPr lang="en-US" sz="850" b="1" dirty="0">
                           <a:solidFill>
                             <a:srgbClr val="FFFFFF"/>
                           </a:solidFill>
@@ -4607,16 +4773,16 @@
                           <a:ea typeface="Meiryo UI" pitchFamily="34" charset="-122"/>
                           <a:cs typeface="Meiryo UI" pitchFamily="34" charset="-120"/>
                         </a:rPr>
-                        <a:t>② 減らす(集約・簡素化)</a:t>
+                        <a:t>② 減らせないか(まとめる・簡単にする)</a:t>
                       </a:r>
-                      <a:endParaRPr lang="en-US" sz="800" dirty="0">
+                      <a:endParaRPr lang="en-US" sz="850" dirty="0">
                         <a:latin typeface="Meiryo UI" charset="0"/>
                         <a:ea typeface="Meiryo UI" charset="0"/>
                         <a:cs typeface="Meiryo UI" charset="0"/>
                       </a:endParaRPr>
                     </a:p>
                   </a:txBody>
-                  <a:tcPr marL="45720" marR="45720" marT="45720" marB="45720" anchor="ctr">
+                  <a:tcPr marL="54864" marR="54864" marT="54864" marB="54864" anchor="ctr">
                     <a:lnL w="6350" cap="flat" cmpd="sng" algn="ctr">
                       <a:solidFill>
                         <a:srgbClr val="D3DED0"/>
@@ -4667,7 +4833,7 @@
                         <a:buNone/>
                       </a:pPr>
                       <a:r>
-                        <a:rPr lang="en-US" sz="800" b="1" dirty="0">
+                        <a:rPr lang="en-US" sz="850" b="1" dirty="0">
                           <a:solidFill>
                             <a:srgbClr val="FFFFFF"/>
                           </a:solidFill>
@@ -4675,16 +4841,16 @@
                           <a:ea typeface="Meiryo UI" pitchFamily="34" charset="-122"/>
                           <a:cs typeface="Meiryo UI" pitchFamily="34" charset="-120"/>
                         </a:rPr>
-                        <a:t>③ 置き換える(工場案を土台に)</a:t>
+                        <a:t>③ 機械に置き換える(工場案を土台に)</a:t>
                       </a:r>
-                      <a:endParaRPr lang="en-US" sz="800" dirty="0">
+                      <a:endParaRPr lang="en-US" sz="850" dirty="0">
                         <a:latin typeface="Meiryo UI" charset="0"/>
                         <a:ea typeface="Meiryo UI" charset="0"/>
                         <a:cs typeface="Meiryo UI" charset="0"/>
                       </a:endParaRPr>
                     </a:p>
                   </a:txBody>
-                  <a:tcPr marL="45720" marR="45720" marT="45720" marB="45720" anchor="ctr">
+                  <a:tcPr marL="54864" marR="54864" marT="54864" marB="54864" anchor="ctr">
                     <a:lnL w="6350" cap="flat" cmpd="sng" algn="ctr">
                       <a:solidFill>
                         <a:srgbClr val="D3DED0"/>
@@ -4737,7 +4903,7 @@
                         <a:buNone/>
                       </a:pPr>
                       <a:r>
-                        <a:rPr lang="en-US" sz="720" b="1" dirty="0">
+                        <a:rPr lang="en-US" sz="780" b="1" dirty="0">
                           <a:solidFill>
                             <a:srgbClr val="2B2B2B"/>
                           </a:solidFill>
@@ -4747,7 +4913,7 @@
                         </a:rPr>
                         <a:t>チューブ供給(5名)</a:t>
                       </a:r>
-                      <a:endParaRPr lang="en-US" sz="720" dirty="0">
+                      <a:endParaRPr lang="en-US" sz="780" dirty="0">
                         <a:latin typeface="Meiryo UI" charset="0"/>
                         <a:ea typeface="Meiryo UI" charset="0"/>
                         <a:cs typeface="Meiryo UI" charset="0"/>
@@ -4758,7 +4924,7 @@
                         <a:buNone/>
                       </a:pPr>
                       <a:r>
-                        <a:rPr lang="en-US" sz="720" b="1" dirty="0">
+                        <a:rPr lang="en-US" sz="780" b="1" dirty="0">
                           <a:solidFill>
                             <a:srgbClr val="2B2B2B"/>
                           </a:solidFill>
@@ -4768,14 +4934,14 @@
                         </a:rPr>
                         <a:t>歯磨包装</a:t>
                       </a:r>
-                      <a:endParaRPr lang="en-US" sz="720" dirty="0">
+                      <a:endParaRPr lang="en-US" sz="780" dirty="0">
                         <a:latin typeface="Meiryo UI" charset="0"/>
                         <a:ea typeface="Meiryo UI" charset="0"/>
                         <a:cs typeface="Meiryo UI" charset="0"/>
                       </a:endParaRPr>
                     </a:p>
                   </a:txBody>
-                  <a:tcPr marL="45720" marR="45720" marT="45720" marB="45720" anchor="ctr">
+                  <a:tcPr marL="54864" marR="54864" marT="54864" marB="54864" anchor="ctr">
                     <a:lnL w="6350" cap="flat" cmpd="sng" algn="ctr">
                       <a:solidFill>
                         <a:srgbClr val="D3DED0"/>
@@ -4826,7 +4992,7 @@
                         <a:buNone/>
                       </a:pPr>
                       <a:r>
-                        <a:rPr lang="en-US" sz="720" dirty="0">
+                        <a:rPr lang="en-US" sz="780" dirty="0">
                           <a:solidFill>
                             <a:srgbClr val="2B2B2B"/>
                           </a:solidFill>
@@ -4834,16 +5000,16 @@
                           <a:ea typeface="Meiryo UI" pitchFamily="34" charset="-122"/>
                           <a:cs typeface="Meiryo UI" pitchFamily="34" charset="-120"/>
                         </a:rPr>
-                        <a:t>養生布の要否(資材仕様)・定数/居残りチェックの方式(重量式等)・PL天地反転の物流条件</a:t>
+                        <a:t>養生布はがし・数のチェック・パレット反転 — 資材や受入ルールを変えれば作業ごと無くせないか</a:t>
                       </a:r>
-                      <a:endParaRPr lang="en-US" sz="720" dirty="0">
+                      <a:endParaRPr lang="en-US" sz="780" dirty="0">
                         <a:latin typeface="Meiryo UI" charset="0"/>
                         <a:ea typeface="Meiryo UI" charset="0"/>
                         <a:cs typeface="Meiryo UI" charset="0"/>
                       </a:endParaRPr>
                     </a:p>
                   </a:txBody>
-                  <a:tcPr marL="45720" marR="45720" marT="45720" marB="45720" anchor="ctr">
+                  <a:tcPr marL="54864" marR="54864" marT="54864" marB="54864" anchor="ctr">
                     <a:lnL w="6350" cap="flat" cmpd="sng" algn="ctr">
                       <a:solidFill>
                         <a:srgbClr val="D3DED0"/>
@@ -4891,7 +5057,7 @@
                         <a:buNone/>
                       </a:pPr>
                       <a:r>
-                        <a:rPr lang="en-US" sz="720" dirty="0">
+                        <a:rPr lang="en-US" sz="780" dirty="0">
                           <a:solidFill>
                             <a:srgbClr val="2B2B2B"/>
                           </a:solidFill>
@@ -4899,16 +5065,16 @@
                           <a:ea typeface="Meiryo UI" pitchFamily="34" charset="-122"/>
                           <a:cs typeface="Meiryo UI" pitchFamily="34" charset="-120"/>
                         </a:rPr>
-                        <a:t>供給頻度・ロットの見直し</a:t>
+                        <a:t>運ぶ回数・ロットの見直し</a:t>
                       </a:r>
-                      <a:endParaRPr lang="en-US" sz="720" dirty="0">
+                      <a:endParaRPr lang="en-US" sz="780" dirty="0">
                         <a:latin typeface="Meiryo UI" charset="0"/>
                         <a:ea typeface="Meiryo UI" charset="0"/>
                         <a:cs typeface="Meiryo UI" charset="0"/>
                       </a:endParaRPr>
                     </a:p>
                   </a:txBody>
-                  <a:tcPr marL="45720" marR="45720" marT="45720" marB="45720" anchor="ctr">
+                  <a:tcPr marL="54864" marR="54864" marT="54864" marB="54864" anchor="ctr">
                     <a:lnL w="6350" cap="flat" cmpd="sng" algn="ctr">
                       <a:solidFill>
                         <a:srgbClr val="D3DED0"/>
@@ -4956,7 +5122,7 @@
                         <a:buNone/>
                       </a:pPr>
                       <a:r>
-                        <a:rPr lang="en-US" sz="720" b="1" dirty="0">
+                        <a:rPr lang="en-US" sz="780" b="1" dirty="0">
                           <a:solidFill>
                             <a:srgbClr val="2B2B2B"/>
                           </a:solidFill>
@@ -4964,16 +5130,16 @@
                           <a:ea typeface="Meiryo UI" pitchFamily="34" charset="-122"/>
                           <a:cs typeface="Meiryo UI" pitchFamily="34" charset="-120"/>
                         </a:rPr>
-                        <a:t>供給自動化 — 過去見積もり76百万円を①②後仕様で再見積もり</a:t>
+                        <a:t>供給の自動化 — 76百万円の見積もりを、①②の後にもう一度計算する</a:t>
                       </a:r>
-                      <a:endParaRPr lang="en-US" sz="720" dirty="0">
+                      <a:endParaRPr lang="en-US" sz="780" dirty="0">
                         <a:latin typeface="Meiryo UI" charset="0"/>
                         <a:ea typeface="Meiryo UI" charset="0"/>
                         <a:cs typeface="Meiryo UI" charset="0"/>
                       </a:endParaRPr>
                     </a:p>
                   </a:txBody>
-                  <a:tcPr marL="45720" marR="45720" marT="45720" marB="45720" anchor="ctr">
+                  <a:tcPr marL="54864" marR="54864" marT="54864" marB="54864" anchor="ctr">
                     <a:lnL w="6350" cap="flat" cmpd="sng" algn="ctr">
                       <a:solidFill>
                         <a:srgbClr val="D3DED0"/>
@@ -5023,7 +5189,7 @@
                         <a:buNone/>
                       </a:pPr>
                       <a:r>
-                        <a:rPr lang="en-US" sz="720" b="1" dirty="0">
+                        <a:rPr lang="en-US" sz="780" b="1" dirty="0">
                           <a:solidFill>
                             <a:srgbClr val="2B2B2B"/>
                           </a:solidFill>
@@ -5033,7 +5199,7 @@
                         </a:rPr>
                         <a:t>ブラシ供給(16名)</a:t>
                       </a:r>
-                      <a:endParaRPr lang="en-US" sz="720" dirty="0">
+                      <a:endParaRPr lang="en-US" sz="780" dirty="0">
                         <a:latin typeface="Meiryo UI" charset="0"/>
                         <a:ea typeface="Meiryo UI" charset="0"/>
                         <a:cs typeface="Meiryo UI" charset="0"/>
@@ -5044,7 +5210,7 @@
                         <a:buNone/>
                       </a:pPr>
                       <a:r>
-                        <a:rPr lang="en-US" sz="720" b="1" dirty="0">
+                        <a:rPr lang="en-US" sz="780" b="1" dirty="0">
                           <a:solidFill>
                             <a:srgbClr val="2B2B2B"/>
                           </a:solidFill>
@@ -5054,14 +5220,14 @@
                         </a:rPr>
                         <a:t>刷子包装</a:t>
                       </a:r>
-                      <a:endParaRPr lang="en-US" sz="720" dirty="0">
+                      <a:endParaRPr lang="en-US" sz="780" dirty="0">
                         <a:latin typeface="Meiryo UI" charset="0"/>
                         <a:ea typeface="Meiryo UI" charset="0"/>
                         <a:cs typeface="Meiryo UI" charset="0"/>
                       </a:endParaRPr>
                     </a:p>
                   </a:txBody>
-                  <a:tcPr marL="45720" marR="45720" marT="45720" marB="45720" anchor="ctr">
+                  <a:tcPr marL="54864" marR="54864" marT="54864" marB="54864" anchor="ctr">
                     <a:lnL w="6350" cap="flat" cmpd="sng" algn="ctr">
                       <a:solidFill>
                         <a:srgbClr val="D3DED0"/>
@@ -5112,7 +5278,7 @@
                         <a:buNone/>
                       </a:pPr>
                       <a:r>
-                        <a:rPr lang="en-US" sz="720" dirty="0">
+                        <a:rPr lang="en-US" sz="780" dirty="0">
                           <a:solidFill>
                             <a:srgbClr val="2B2B2B"/>
                           </a:solidFill>
@@ -5120,16 +5286,16 @@
                           <a:ea typeface="Meiryo UI" pitchFamily="34" charset="-122"/>
                           <a:cs typeface="Meiryo UI" pitchFamily="34" charset="-120"/>
                         </a:rPr>
-                        <a:t>除電集塵機投入の要否(帯電対策の上流化)</a:t>
+                        <a:t>除電集塵機への投入 — 帯電対策を前の工程でできないか</a:t>
                       </a:r>
-                      <a:endParaRPr lang="en-US" sz="720" dirty="0">
+                      <a:endParaRPr lang="en-US" sz="780" dirty="0">
                         <a:latin typeface="Meiryo UI" charset="0"/>
                         <a:ea typeface="Meiryo UI" charset="0"/>
                         <a:cs typeface="Meiryo UI" charset="0"/>
                       </a:endParaRPr>
                     </a:p>
                   </a:txBody>
-                  <a:tcPr marL="45720" marR="45720" marT="45720" marB="45720" anchor="ctr">
+                  <a:tcPr marL="54864" marR="54864" marT="54864" marB="54864" anchor="ctr">
                     <a:lnL w="6350" cap="flat" cmpd="sng" algn="ctr">
                       <a:solidFill>
                         <a:srgbClr val="D3DED0"/>
@@ -5177,7 +5343,7 @@
                         <a:buNone/>
                       </a:pPr>
                       <a:r>
-                        <a:rPr lang="en-US" sz="720" dirty="0">
+                        <a:rPr lang="en-US" sz="780" dirty="0">
                           <a:solidFill>
                             <a:srgbClr val="2B2B2B"/>
                           </a:solidFill>
@@ -5185,16 +5351,16 @@
                           <a:ea typeface="Meiryo UI" pitchFamily="34" charset="-122"/>
                           <a:cs typeface="Meiryo UI" pitchFamily="34" charset="-120"/>
                         </a:rPr>
-                        <a:t>複数ラインの供給業務集約・AMR統合</a:t>
+                        <a:t>複数ラインの供給をまとめて運ぶ(AMR)</a:t>
                       </a:r>
-                      <a:endParaRPr lang="en-US" sz="720" dirty="0">
+                      <a:endParaRPr lang="en-US" sz="780" dirty="0">
                         <a:latin typeface="Meiryo UI" charset="0"/>
                         <a:ea typeface="Meiryo UI" charset="0"/>
                         <a:cs typeface="Meiryo UI" charset="0"/>
                       </a:endParaRPr>
                     </a:p>
                   </a:txBody>
-                  <a:tcPr marL="45720" marR="45720" marT="45720" marB="45720" anchor="ctr">
+                  <a:tcPr marL="54864" marR="54864" marT="54864" marB="54864" anchor="ctr">
                     <a:lnL w="6350" cap="flat" cmpd="sng" algn="ctr">
                       <a:solidFill>
                         <a:srgbClr val="D3DED0"/>
@@ -5242,7 +5408,7 @@
                         <a:buNone/>
                       </a:pPr>
                       <a:r>
-                        <a:rPr lang="en-US" sz="720" dirty="0">
+                        <a:rPr lang="en-US" sz="780" dirty="0">
                           <a:solidFill>
                             <a:srgbClr val="2B2B2B"/>
                           </a:solidFill>
@@ -5250,16 +5416,16 @@
                           <a:ea typeface="Meiryo UI" pitchFamily="34" charset="-122"/>
                           <a:cs typeface="Meiryo UI" pitchFamily="34" charset="-120"/>
                         </a:rPr>
-                        <a:t>中間製品供給機 — スペース制約は②の集約・レイアウト見直しとセットで再検討</a:t>
+                        <a:t>中間製品供給機 — 場所の問題は②とセットで再検討</a:t>
                       </a:r>
-                      <a:endParaRPr lang="en-US" sz="720" dirty="0">
+                      <a:endParaRPr lang="en-US" sz="780" dirty="0">
                         <a:latin typeface="Meiryo UI" charset="0"/>
                         <a:ea typeface="Meiryo UI" charset="0"/>
                         <a:cs typeface="Meiryo UI" charset="0"/>
                       </a:endParaRPr>
                     </a:p>
                   </a:txBody>
-                  <a:tcPr marL="45720" marR="45720" marT="45720" marB="45720" anchor="ctr">
+                  <a:tcPr marL="54864" marR="54864" marT="54864" marB="54864" anchor="ctr">
                     <a:lnL w="6350" cap="flat" cmpd="sng" algn="ctr">
                       <a:solidFill>
                         <a:srgbClr val="D3DED0"/>
@@ -5309,7 +5475,7 @@
                         <a:buNone/>
                       </a:pPr>
                       <a:r>
-                        <a:rPr lang="en-US" sz="720" b="1" dirty="0">
+                        <a:rPr lang="en-US" sz="780" b="1" dirty="0">
                           <a:solidFill>
                             <a:srgbClr val="2B2B2B"/>
                           </a:solidFill>
@@ -5319,14 +5485,14 @@
                         </a:rPr>
                         <a:t>植毛 供給+箱詰め(22名)</a:t>
                       </a:r>
-                      <a:endParaRPr lang="en-US" sz="720" dirty="0">
+                      <a:endParaRPr lang="en-US" sz="780" dirty="0">
                         <a:latin typeface="Meiryo UI" charset="0"/>
                         <a:ea typeface="Meiryo UI" charset="0"/>
                         <a:cs typeface="Meiryo UI" charset="0"/>
                       </a:endParaRPr>
                     </a:p>
                   </a:txBody>
-                  <a:tcPr marL="45720" marR="45720" marT="45720" marB="45720" anchor="ctr">
+                  <a:tcPr marL="54864" marR="54864" marT="54864" marB="54864" anchor="ctr">
                     <a:lnL w="6350" cap="flat" cmpd="sng" algn="ctr">
                       <a:solidFill>
                         <a:srgbClr val="D3DED0"/>
@@ -5377,7 +5543,7 @@
                         <a:buNone/>
                       </a:pPr>
                       <a:r>
-                        <a:rPr lang="en-US" sz="720" dirty="0">
+                        <a:rPr lang="en-US" sz="780" dirty="0">
                           <a:solidFill>
                             <a:srgbClr val="2B2B2B"/>
                           </a:solidFill>
@@ -5385,16 +5551,16 @@
                           <a:ea typeface="Meiryo UI" pitchFamily="34" charset="-122"/>
                           <a:cs typeface="Meiryo UI" pitchFamily="34" charset="-120"/>
                         </a:rPr>
-                        <a:t>段ボール天面カット・フラップ固定(資材仕様変更で作業ごと消す)・定数チェック方式</a:t>
+                        <a:t>段ボールのカット・フラップ留め — 箱の仕様変更で無くせないか。数のチェックの方式も見直す</a:t>
                       </a:r>
-                      <a:endParaRPr lang="en-US" sz="720" dirty="0">
+                      <a:endParaRPr lang="en-US" sz="780" dirty="0">
                         <a:latin typeface="Meiryo UI" charset="0"/>
                         <a:ea typeface="Meiryo UI" charset="0"/>
                         <a:cs typeface="Meiryo UI" charset="0"/>
                       </a:endParaRPr>
                     </a:p>
                   </a:txBody>
-                  <a:tcPr marL="45720" marR="45720" marT="45720" marB="45720" anchor="ctr">
+                  <a:tcPr marL="54864" marR="54864" marT="54864" marB="54864" anchor="ctr">
                     <a:lnL w="6350" cap="flat" cmpd="sng" algn="ctr">
                       <a:solidFill>
                         <a:srgbClr val="D3DED0"/>
@@ -5442,7 +5608,7 @@
                         <a:buNone/>
                       </a:pPr>
                       <a:r>
-                        <a:rPr lang="en-US" sz="720" dirty="0">
+                        <a:rPr lang="en-US" sz="780" dirty="0">
                           <a:solidFill>
                             <a:srgbClr val="2B2B2B"/>
                           </a:solidFill>
@@ -5450,16 +5616,16 @@
                           <a:ea typeface="Meiryo UI" pitchFamily="34" charset="-122"/>
                           <a:cs typeface="Meiryo UI" pitchFamily="34" charset="-120"/>
                         </a:rPr>
-                        <a:t>空段ボール解体等の間接作業の束ね・複数ライン兼務</a:t>
+                        <a:t>空箱の解体などの細かい作業を束ねて兼務にする</a:t>
                       </a:r>
-                      <a:endParaRPr lang="en-US" sz="720" dirty="0">
+                      <a:endParaRPr lang="en-US" sz="780" dirty="0">
                         <a:latin typeface="Meiryo UI" charset="0"/>
                         <a:ea typeface="Meiryo UI" charset="0"/>
                         <a:cs typeface="Meiryo UI" charset="0"/>
                       </a:endParaRPr>
                     </a:p>
                   </a:txBody>
-                  <a:tcPr marL="45720" marR="45720" marT="45720" marB="45720" anchor="ctr">
+                  <a:tcPr marL="54864" marR="54864" marT="54864" marB="54864" anchor="ctr">
                     <a:lnL w="6350" cap="flat" cmpd="sng" algn="ctr">
                       <a:solidFill>
                         <a:srgbClr val="D3DED0"/>
@@ -5507,7 +5673,7 @@
                         <a:buNone/>
                       </a:pPr>
                       <a:r>
-                        <a:rPr lang="en-US" sz="720" b="1" dirty="0">
+                        <a:rPr lang="en-US" sz="780" b="1" dirty="0">
                           <a:solidFill>
                             <a:srgbClr val="2B2B2B"/>
                           </a:solidFill>
@@ -5515,16 +5681,16 @@
                           <a:ea typeface="Meiryo UI" pitchFamily="34" charset="-122"/>
                           <a:cs typeface="Meiryo UI" pitchFamily="34" charset="-120"/>
                         </a:rPr>
-                        <a:t>ヒューマノイド/フィジカルAI — 供給+箱詰め+巡回を1台で束ね「1名あたり投資」を再計算</a:t>
+                        <a:t>ロボット1台に複数の作業を任せ、「1名あたりの投資額」を計算し直す</a:t>
                       </a:r>
-                      <a:endParaRPr lang="en-US" sz="720" dirty="0">
+                      <a:endParaRPr lang="en-US" sz="780" dirty="0">
                         <a:latin typeface="Meiryo UI" charset="0"/>
                         <a:ea typeface="Meiryo UI" charset="0"/>
                         <a:cs typeface="Meiryo UI" charset="0"/>
                       </a:endParaRPr>
                     </a:p>
                   </a:txBody>
-                  <a:tcPr marL="45720" marR="45720" marT="45720" marB="45720" anchor="ctr">
+                  <a:tcPr marL="54864" marR="54864" marT="54864" marB="54864" anchor="ctr">
                     <a:lnL w="6350" cap="flat" cmpd="sng" algn="ctr">
                       <a:solidFill>
                         <a:srgbClr val="D3DED0"/>
@@ -5574,7 +5740,7 @@
                         <a:buNone/>
                       </a:pPr>
                       <a:r>
-                        <a:rPr lang="en-US" sz="720" b="1" dirty="0">
+                        <a:rPr lang="en-US" sz="780" b="1" dirty="0">
                           <a:solidFill>
                             <a:srgbClr val="2B2B2B"/>
                           </a:solidFill>
@@ -5584,14 +5750,14 @@
                         </a:rPr>
                         <a:t>植毛 検査+長毛(23名)</a:t>
                       </a:r>
-                      <a:endParaRPr lang="en-US" sz="720" dirty="0">
+                      <a:endParaRPr lang="en-US" sz="780" dirty="0">
                         <a:latin typeface="Meiryo UI" charset="0"/>
                         <a:ea typeface="Meiryo UI" charset="0"/>
                         <a:cs typeface="Meiryo UI" charset="0"/>
                       </a:endParaRPr>
                     </a:p>
                   </a:txBody>
-                  <a:tcPr marL="45720" marR="45720" marT="45720" marB="45720" anchor="ctr">
+                  <a:tcPr marL="54864" marR="54864" marT="54864" marB="54864" anchor="ctr">
                     <a:lnL w="6350" cap="flat" cmpd="sng" algn="ctr">
                       <a:solidFill>
                         <a:srgbClr val="D3DED0"/>
@@ -5642,7 +5808,7 @@
                         <a:buNone/>
                       </a:pPr>
                       <a:r>
-                        <a:rPr lang="en-US" sz="720" dirty="0">
+                        <a:rPr lang="en-US" sz="780" dirty="0">
                           <a:solidFill>
                             <a:srgbClr val="2B2B2B"/>
                           </a:solidFill>
@@ -5650,16 +5816,16 @@
                           <a:ea typeface="Meiryo UI" pitchFamily="34" charset="-122"/>
                           <a:cs typeface="Meiryo UI" pitchFamily="34" charset="-120"/>
                         </a:rPr>
-                        <a:t>15項目×品質実績の突合で検査機の必須仕様を絞る(前頁)・長毛は上流の植毛条件で発生源対策</a:t>
+                        <a:t>15種類×実績の突き合わせで、検査機の仕様を絞る(前頁)。長毛は発生源を工程側で潰せないか</a:t>
                       </a:r>
-                      <a:endParaRPr lang="en-US" sz="720" dirty="0">
+                      <a:endParaRPr lang="en-US" sz="780" dirty="0">
                         <a:latin typeface="Meiryo UI" charset="0"/>
                         <a:ea typeface="Meiryo UI" charset="0"/>
                         <a:cs typeface="Meiryo UI" charset="0"/>
                       </a:endParaRPr>
                     </a:p>
                   </a:txBody>
-                  <a:tcPr marL="45720" marR="45720" marT="45720" marB="45720" anchor="ctr">
+                  <a:tcPr marL="54864" marR="54864" marT="54864" marB="54864" anchor="ctr">
                     <a:lnL w="6350" cap="flat" cmpd="sng" algn="ctr">
                       <a:solidFill>
                         <a:srgbClr val="D3DED0"/>
@@ -5707,7 +5873,7 @@
                         <a:buNone/>
                       </a:pPr>
                       <a:r>
-                        <a:rPr lang="en-US" sz="720" dirty="0">
+                        <a:rPr lang="en-US" sz="780" dirty="0">
                           <a:solidFill>
                             <a:srgbClr val="2B2B2B"/>
                           </a:solidFill>
@@ -5715,16 +5881,16 @@
                           <a:ea typeface="Meiryo UI" pitchFamily="34" charset="-122"/>
                           <a:cs typeface="Meiryo UI" pitchFamily="34" charset="-120"/>
                         </a:rPr>
-                        <a:t>パトロール検査と全数検査の役割再設計</a:t>
+                        <a:t>見回り検査と全数検査の役割を整理する</a:t>
                       </a:r>
-                      <a:endParaRPr lang="en-US" sz="720" dirty="0">
+                      <a:endParaRPr lang="en-US" sz="780" dirty="0">
                         <a:latin typeface="Meiryo UI" charset="0"/>
                         <a:ea typeface="Meiryo UI" charset="0"/>
                         <a:cs typeface="Meiryo UI" charset="0"/>
                       </a:endParaRPr>
                     </a:p>
                   </a:txBody>
-                  <a:tcPr marL="45720" marR="45720" marT="45720" marB="45720" anchor="ctr">
+                  <a:tcPr marL="54864" marR="54864" marT="54864" marB="54864" anchor="ctr">
                     <a:lnL w="6350" cap="flat" cmpd="sng" algn="ctr">
                       <a:solidFill>
                         <a:srgbClr val="D3DED0"/>
@@ -5772,7 +5938,7 @@
                         <a:buNone/>
                       </a:pPr>
                       <a:r>
-                        <a:rPr lang="en-US" sz="720" b="1" dirty="0">
+                        <a:rPr lang="en-US" sz="780" b="1" dirty="0">
                           <a:solidFill>
                             <a:srgbClr val="2B2B2B"/>
                           </a:solidFill>
@@ -5780,16 +5946,16 @@
                           <a:ea typeface="Meiryo UI" pitchFamily="34" charset="-122"/>
                           <a:cs typeface="Meiryo UI" pitchFamily="34" charset="-120"/>
                         </a:rPr>
-                        <a:t>自動検査機(主打ち手・工場見解と一致)。絞った仕様で開発</a:t>
+                        <a:t>自動検査機(主役・工場案と一致)。絞った仕様で開発する</a:t>
                       </a:r>
-                      <a:endParaRPr lang="en-US" sz="720" dirty="0">
+                      <a:endParaRPr lang="en-US" sz="780" dirty="0">
                         <a:latin typeface="Meiryo UI" charset="0"/>
                         <a:ea typeface="Meiryo UI" charset="0"/>
                         <a:cs typeface="Meiryo UI" charset="0"/>
                       </a:endParaRPr>
                     </a:p>
                   </a:txBody>
-                  <a:tcPr marL="45720" marR="45720" marT="45720" marB="45720" anchor="ctr">
+                  <a:tcPr marL="54864" marR="54864" marT="54864" marB="54864" anchor="ctr">
                     <a:lnL w="6350" cap="flat" cmpd="sng" algn="ctr">
                       <a:solidFill>
                         <a:srgbClr val="D3DED0"/>
@@ -5839,7 +6005,7 @@
                         <a:buNone/>
                       </a:pPr>
                       <a:r>
-                        <a:rPr lang="en-US" sz="720" b="1" dirty="0">
+                        <a:rPr lang="en-US" sz="780" b="1" dirty="0">
                           <a:solidFill>
                             <a:srgbClr val="2B2B2B"/>
                           </a:solidFill>
@@ -5847,16 +6013,16 @@
                           <a:ea typeface="Meiryo UI" pitchFamily="34" charset="-122"/>
                           <a:cs typeface="Meiryo UI" pitchFamily="34" charset="-120"/>
                         </a:rPr>
-                        <a:t>横断</a:t>
+                        <a:t>全体に関わること</a:t>
                       </a:r>
-                      <a:endParaRPr lang="en-US" sz="720" dirty="0">
+                      <a:endParaRPr lang="en-US" sz="780" dirty="0">
                         <a:latin typeface="Meiryo UI" charset="0"/>
                         <a:ea typeface="Meiryo UI" charset="0"/>
                         <a:cs typeface="Meiryo UI" charset="0"/>
                       </a:endParaRPr>
                     </a:p>
                   </a:txBody>
-                  <a:tcPr marL="45720" marR="45720" marT="45720" marB="45720" anchor="ctr">
+                  <a:tcPr marL="54864" marR="54864" marT="54864" marB="54864" anchor="ctr">
                     <a:lnL w="6350" cap="flat" cmpd="sng" algn="ctr">
                       <a:solidFill>
                         <a:srgbClr val="D3DED0"/>
@@ -5907,7 +6073,7 @@
                         <a:buNone/>
                       </a:pPr>
                       <a:r>
-                        <a:rPr lang="en-US" sz="720" b="1" dirty="0">
+                        <a:rPr lang="en-US" sz="780" b="1" dirty="0">
                           <a:solidFill>
                             <a:srgbClr val="2B2B2B"/>
                           </a:solidFill>
@@ -5915,16 +6081,16 @@
                           <a:ea typeface="Meiryo UI" pitchFamily="34" charset="-122"/>
                           <a:cs typeface="Meiryo UI" pitchFamily="34" charset="-120"/>
                         </a:rPr>
-                        <a:t>投資基準(39,200/44,100千円/名)の前提人件費を賃上げ環境で更新</a:t>
+                        <a:t>投資基準(39,200/44,100千円/名)の前提人件費を、今の賃金水準に更新する</a:t>
                       </a:r>
-                      <a:endParaRPr lang="en-US" sz="720" dirty="0">
+                      <a:endParaRPr lang="en-US" sz="780" dirty="0">
                         <a:latin typeface="Meiryo UI" charset="0"/>
                         <a:ea typeface="Meiryo UI" charset="0"/>
                         <a:cs typeface="Meiryo UI" charset="0"/>
                       </a:endParaRPr>
                     </a:p>
                   </a:txBody>
-                  <a:tcPr marL="45720" marR="45720" marT="45720" marB="45720" anchor="ctr">
+                  <a:tcPr marL="54864" marR="54864" marT="54864" marB="54864" anchor="ctr">
                     <a:lnL w="6350" cap="flat" cmpd="sng" algn="ctr">
                       <a:solidFill>
                         <a:srgbClr val="D3DED0"/>
@@ -5972,7 +6138,7 @@
                         <a:buNone/>
                       </a:pPr>
                       <a:r>
-                        <a:rPr lang="en-US" sz="720" dirty="0">
+                        <a:rPr lang="en-US" sz="780" dirty="0">
                           <a:solidFill>
                             <a:srgbClr val="2B2B2B"/>
                           </a:solidFill>
@@ -5980,16 +6146,16 @@
                           <a:ea typeface="Meiryo UI" pitchFamily="34" charset="-122"/>
                           <a:cs typeface="Meiryo UI" pitchFamily="34" charset="-120"/>
                         </a:rPr>
-                        <a:t>「1台1作業1ライン」の評価枠を「作業束ね・複数ライン共用」へ</a:t>
+                        <a:t>「1台1作業1ライン」ではなく「束ねて評価」に変える</a:t>
                       </a:r>
-                      <a:endParaRPr lang="en-US" sz="720" dirty="0">
+                      <a:endParaRPr lang="en-US" sz="780" dirty="0">
                         <a:latin typeface="Meiryo UI" charset="0"/>
                         <a:ea typeface="Meiryo UI" charset="0"/>
                         <a:cs typeface="Meiryo UI" charset="0"/>
                       </a:endParaRPr>
                     </a:p>
                   </a:txBody>
-                  <a:tcPr marL="45720" marR="45720" marT="45720" marB="45720" anchor="ctr">
+                  <a:tcPr marL="54864" marR="54864" marT="54864" marB="54864" anchor="ctr">
                     <a:lnL w="6350" cap="flat" cmpd="sng" algn="ctr">
                       <a:solidFill>
                         <a:srgbClr val="D3DED0"/>
@@ -6037,7 +6203,7 @@
                         <a:buNone/>
                       </a:pPr>
                       <a:r>
-                        <a:rPr lang="en-US" sz="720" dirty="0">
+                        <a:rPr lang="en-US" sz="780" dirty="0">
                           <a:solidFill>
                             <a:srgbClr val="595959"/>
                           </a:solidFill>
@@ -6047,14 +6213,14 @@
                         </a:rPr>
                         <a:t>—</a:t>
                       </a:r>
-                      <a:endParaRPr lang="en-US" sz="720" dirty="0">
+                      <a:endParaRPr lang="en-US" sz="780" dirty="0">
                         <a:latin typeface="Meiryo UI" charset="0"/>
                         <a:ea typeface="Meiryo UI" charset="0"/>
                         <a:cs typeface="Meiryo UI" charset="0"/>
                       </a:endParaRPr>
                     </a:p>
                   </a:txBody>
-                  <a:tcPr marL="45720" marR="45720" marT="45720" marB="45720" anchor="ctr">
+                  <a:tcPr marL="54864" marR="54864" marT="54864" marB="54864" anchor="ctr">
                     <a:lnL w="6350" cap="flat" cmpd="sng" algn="ctr">
                       <a:solidFill>
                         <a:srgbClr val="D3DED0"/>
@@ -6150,7 +6316,7 @@
               <a:buNone/>
             </a:pPr>
             <a:r>
-              <a:rPr lang="en-US" sz="1050" b="1" dirty="0">
+              <a:rPr lang="en-US" sz="1100" b="1" dirty="0">
                 <a:solidFill>
                   <a:srgbClr val="1F3D20"/>
                 </a:solidFill>
@@ -6158,9 +6324,9 @@
                 <a:ea typeface="Meiryo UI" pitchFamily="34" charset="-122"/>
                 <a:cs typeface="Meiryo UI" pitchFamily="34" charset="-120"/>
               </a:rPr>
-              <a:t>8/28 意見交換の進め方</a:t>
-            </a:r>
-            <a:endParaRPr lang="en-US" sz="1050" dirty="0"/>
+              <a:t>当日の進め方(4つ)</a:t>
+            </a:r>
+            <a:endParaRPr lang="en-US" sz="1100" dirty="0"/>
           </a:p>
         </p:txBody>
       </p:sp>
@@ -6187,12 +6353,12 @@
           <a:p>
             <a:pPr indent="0" marL="0">
               <a:lnSpc>
-                <a:spcPct val="115000"/>
+                <a:spcPct val="118000"/>
               </a:lnSpc>
               <a:buNone/>
             </a:pPr>
             <a:r>
-              <a:rPr lang="en-US" sz="790" b="1" dirty="0">
+              <a:rPr lang="en-US" sz="850" b="1" dirty="0">
                 <a:solidFill>
                   <a:srgbClr val="2B2B2B"/>
                 </a:solidFill>
@@ -6200,16 +6366,16 @@
                 <a:ea typeface="Meiryo UI" pitchFamily="34" charset="-122"/>
                 <a:cs typeface="Meiryo UI" pitchFamily="34" charset="-120"/>
               </a:rPr>
-              <a:t>1. 冒頭で明言: </a:t>
+              <a:t>1. 最初に伝える: </a:t>
             </a:r>
             <a:pPr indent="0" marL="0">
               <a:lnSpc>
-                <a:spcPct val="115000"/>
+                <a:spcPct val="118000"/>
               </a:lnSpc>
               <a:buNone/>
             </a:pPr>
             <a:r>
-              <a:rPr lang="en-US" sz="790" dirty="0">
+              <a:rPr lang="en-US" sz="850" dirty="0">
                 <a:solidFill>
                   <a:srgbClr val="2B2B2B"/>
                 </a:solidFill>
@@ -6217,17 +6383,17 @@
                 <a:ea typeface="Meiryo UI" pitchFamily="34" charset="-122"/>
                 <a:cs typeface="Meiryo UI" pitchFamily="34" charset="-120"/>
               </a:rPr>
-              <a:t>「過去検討のやり直しではない。過去の見積もり・判断は台帳の中核資産。変わった前提だけを更新する」— ワーディングは「ゼロベース」「棚卸し」でなく「前提更新」「検査機仕様を軽くする前処理」
+              <a:t>「やり直しではない。過去の見積もり・判断はそのまま活かし、変わった前提だけ更新する」(「ゼロベース」「棚卸し」という言葉は使わない)
 </a:t>
             </a:r>
             <a:pPr indent="0" marL="0">
               <a:lnSpc>
-                <a:spcPct val="115000"/>
+                <a:spcPct val="118000"/>
               </a:lnSpc>
               <a:buNone/>
             </a:pPr>
             <a:r>
-              <a:rPr lang="en-US" sz="790" b="1" dirty="0">
+              <a:rPr lang="en-US" sz="850" b="1" dirty="0">
                 <a:solidFill>
                   <a:srgbClr val="2B2B2B"/>
                 </a:solidFill>
@@ -6235,16 +6401,17 @@
                 <a:ea typeface="Meiryo UI" pitchFamily="34" charset="-122"/>
                 <a:cs typeface="Meiryo UI" pitchFamily="34" charset="-120"/>
               </a:rPr>
-              <a:t>2. 工場のスコープ候補をそのまま③の候補リストとして承認する</a:t>
+              <a:t>2. 工場のスコープ案は、そのまま自動化(③)の候補リストとして採用する
+</a:t>
             </a:r>
             <a:pPr indent="0" marL="0">
               <a:lnSpc>
-                <a:spcPct val="115000"/>
+                <a:spcPct val="118000"/>
               </a:lnSpc>
               <a:buNone/>
             </a:pPr>
             <a:r>
-              <a:rPr lang="en-US" sz="790" dirty="0">
+              <a:rPr lang="en-US" sz="850" b="1" dirty="0">
                 <a:solidFill>
                   <a:srgbClr val="2B2B2B"/>
                 </a:solidFill>
@@ -6252,17 +6419,16 @@
                 <a:ea typeface="Meiryo UI" pitchFamily="34" charset="-122"/>
                 <a:cs typeface="Meiryo UI" pitchFamily="34" charset="-120"/>
               </a:rPr>
-              <a:t> — Howから入っていること自体は正当
-</a:t>
+              <a:t>3. 演習をひとつ: </a:t>
             </a:r>
             <a:pPr indent="0" marL="0">
               <a:lnSpc>
-                <a:spcPct val="115000"/>
+                <a:spcPct val="118000"/>
               </a:lnSpc>
               <a:buNone/>
             </a:pPr>
             <a:r>
-              <a:rPr lang="en-US" sz="790" b="1" dirty="0">
+              <a:rPr lang="en-US" sz="850" dirty="0">
                 <a:solidFill>
                   <a:srgbClr val="2B2B2B"/>
                 </a:solidFill>
@@ -6270,16 +6436,17 @@
                 <a:ea typeface="Meiryo UI" pitchFamily="34" charset="-122"/>
                 <a:cs typeface="Meiryo UI" pitchFamily="34" charset="-120"/>
               </a:rPr>
-              <a:t>3. 1工程だけ演習: </a:t>
+              <a:t>チューブ供給(76百万円)で「付帯作業を無くしたら装置はいくらになるか」を、その場で一緒に概算してみる
+</a:t>
             </a:r>
             <a:pPr indent="0" marL="0">
               <a:lnSpc>
-                <a:spcPct val="115000"/>
+                <a:spcPct val="118000"/>
               </a:lnSpc>
               <a:buNone/>
             </a:pPr>
             <a:r>
-              <a:rPr lang="en-US" sz="790" dirty="0">
+              <a:rPr lang="en-US" sz="850" b="1" dirty="0">
                 <a:solidFill>
                   <a:srgbClr val="2B2B2B"/>
                 </a:solidFill>
@@ -6287,17 +6454,16 @@
                 <a:ea typeface="Meiryo UI" pitchFamily="34" charset="-122"/>
                 <a:cs typeface="Meiryo UI" pitchFamily="34" charset="-120"/>
               </a:rPr>
-              <a:t>チューブ供給(76百万円)で「サブルーチンを消したら見積もりはいくらか」を一緒に概算 — ①②の価値を工場自身の案件の蘇生で見せる
-</a:t>
+              <a:t>4. 検査は前頁を提示: </a:t>
             </a:r>
             <a:pPr indent="0" marL="0">
               <a:lnSpc>
-                <a:spcPct val="115000"/>
+                <a:spcPct val="118000"/>
               </a:lnSpc>
               <a:buNone/>
             </a:pPr>
             <a:r>
-              <a:rPr lang="en-US" sz="790" b="1" dirty="0">
+              <a:rPr lang="en-US" sz="850" dirty="0">
                 <a:solidFill>
                   <a:srgbClr val="2B2B2B"/>
                 </a:solidFill>
@@ -6305,26 +6471,9 @@
                 <a:ea typeface="Meiryo UI" pitchFamily="34" charset="-122"/>
                 <a:cs typeface="Meiryo UI" pitchFamily="34" charset="-120"/>
               </a:rPr>
-              <a:t>4. 検査は前頁の整理を提示: </a:t>
-            </a:r>
-            <a:pPr indent="0" marL="0">
-              <a:lnSpc>
-                <a:spcPct val="115000"/>
-              </a:lnSpc>
-              <a:buNone/>
-            </a:pPr>
-            <a:r>
-              <a:rPr lang="en-US" sz="790" dirty="0">
-                <a:solidFill>
-                  <a:srgbClr val="2B2B2B"/>
-                </a:solidFill>
-                <a:latin typeface="Meiryo UI" pitchFamily="34" charset="0"/>
-                <a:ea typeface="Meiryo UI" pitchFamily="34" charset="-122"/>
-                <a:cs typeface="Meiryo UI" pitchFamily="34" charset="-120"/>
-              </a:rPr>
-              <a:t>15項目×実績突合を品質保証+工場QAの共同タスクとして提案(投資ゼロ)</a:t>
-            </a:r>
-            <a:endParaRPr lang="en-US" sz="790" dirty="0"/>
+              <a:t>15種類×実績の突き合わせを、品質保証+工場QAの共同タスクとして提案する(費用ゼロ)</a:t>
+            </a:r>
+            <a:endParaRPr lang="en-US" sz="850" dirty="0"/>
           </a:p>
         </p:txBody>
       </p:sp>
@@ -6380,7 +6529,7 @@
               <a:buNone/>
             </a:pPr>
             <a:r>
-              <a:rPr lang="en-US" sz="1050" b="1" dirty="0">
+              <a:rPr lang="en-US" sz="1100" b="1" dirty="0">
                 <a:solidFill>
                   <a:srgbClr val="D8E8D4"/>
                 </a:solidFill>
@@ -6388,9 +6537,9 @@
                 <a:ea typeface="Meiryo UI" pitchFamily="34" charset="-122"/>
                 <a:cs typeface="Meiryo UI" pitchFamily="34" charset="-120"/>
               </a:rPr>
-              <a:t>この場で決めること(3点)</a:t>
-            </a:r>
-            <a:endParaRPr lang="en-US" sz="1050" dirty="0"/>
+              <a:t>この場で決めたいこと(3つ)</a:t>
+            </a:r>
+            <a:endParaRPr lang="en-US" sz="1100" dirty="0"/>
           </a:p>
         </p:txBody>
       </p:sp>
@@ -6417,12 +6566,12 @@
           <a:p>
             <a:pPr indent="0" marL="0">
               <a:lnSpc>
-                <a:spcPct val="125000"/>
+                <a:spcPct val="128000"/>
               </a:lnSpc>
               <a:buNone/>
             </a:pPr>
             <a:r>
-              <a:rPr lang="en-US" sz="860" b="1" dirty="0">
+              <a:rPr lang="en-US" sz="900" b="1" dirty="0">
                 <a:solidFill>
                   <a:srgbClr val="FFFFFF"/>
                 </a:solidFill>
@@ -6430,17 +6579,17 @@
                 <a:ea typeface="Meiryo UI" pitchFamily="34" charset="-122"/>
                 <a:cs typeface="Meiryo UI" pitchFamily="34" charset="-120"/>
               </a:rPr>
-              <a:t>(a) 過去検討3案件の再見積もり(①②後仕様+賃上げ後投資基準)をクイックウィン候補としてWBSに追加するか
+              <a:t>(a) 過去3案件の見積もりし直し(①②の後の仕様+今の賃金水準)を、早期成果の候補に加えるか
 </a:t>
             </a:r>
             <a:pPr indent="0" marL="0">
               <a:lnSpc>
-                <a:spcPct val="125000"/>
+                <a:spcPct val="128000"/>
               </a:lnSpc>
               <a:buNone/>
             </a:pPr>
             <a:r>
-              <a:rPr lang="en-US" sz="860" b="1" dirty="0">
+              <a:rPr lang="en-US" sz="900" b="1" dirty="0">
                 <a:solidFill>
                   <a:srgbClr val="FFFFFF"/>
                 </a:solidFill>
@@ -6448,17 +6597,17 @@
                 <a:ea typeface="Meiryo UI" pitchFamily="34" charset="-122"/>
                 <a:cs typeface="Meiryo UI" pitchFamily="34" charset="-120"/>
               </a:rPr>
-              <a:t>(b) 検査15項目×品質実績突合の担当と期限(品質保証+工場QA、26/10目安)
+              <a:t>(b) 検査15種類×実績の突き合わせ — 誰が・いつまでに(品質保証+工場QA、26/10目安)
 </a:t>
             </a:r>
             <a:pPr indent="0" marL="0">
               <a:lnSpc>
-                <a:spcPct val="125000"/>
+                <a:spcPct val="128000"/>
               </a:lnSpc>
               <a:buNone/>
             </a:pPr>
             <a:r>
-              <a:rPr lang="en-US" sz="860" b="1" dirty="0">
+              <a:rPr lang="en-US" sz="900" b="1" dirty="0">
                 <a:solidFill>
                   <a:srgbClr val="FFFFFF"/>
                 </a:solidFill>
@@ -6466,9 +6615,9 @@
                 <a:ea typeface="Meiryo UI" pitchFamily="34" charset="-122"/>
                 <a:cs typeface="Meiryo UI" pitchFamily="34" charset="-120"/>
               </a:rPr>
-              <a:t>(c) 投資基準の前提更新をSCM戦略部に依頼するか</a:t>
-            </a:r>
-            <a:endParaRPr lang="en-US" sz="860" dirty="0"/>
+              <a:t>(c) 投資基準の前提更新を、SCM戦略部に依頼するか</a:t>
+            </a:r>
+            <a:endParaRPr lang="en-US" sz="900" dirty="0"/>
           </a:p>
         </p:txBody>
       </p:sp>
@@ -6505,7 +6654,7 @@
                 <a:ea typeface="Meiryo UI" pitchFamily="34" charset="-122"/>
                 <a:cs typeface="Meiryo UI" pitchFamily="34" charset="-120"/>
               </a:rPr>
-              <a:t>出典: 明工・生技G資料(2026/8/27)・BPR資料 ※①②の候補は仮説であり、採否は工場・品質保証との共同検証で確定する(議論の上でタブーな内容はない前提)</a:t>
+              <a:t>出典: 明工・生技G資料(2026/8/27) ※①②の候補は仮説。やるかどうかは工場・品質保証との共同検証で決める(議論の上でタブーな内容はない前提)</a:t>
             </a:r>
             <a:endParaRPr lang="en-US" sz="680" dirty="0"/>
           </a:p>
